--- a/presentation/sdv2-presentation.pptx
+++ b/presentation/sdv2-presentation.pptx
@@ -5574,7 +5574,7 @@
                 <a:ea typeface="Segoe UI" pitchFamily="34" charset="-122"/>
                 <a:cs typeface="Segoe UI" pitchFamily="34" charset="-120"/>
               </a:rPr>
-              <a:t>Goes away when SDv2 for OneAgent GAs in June 2026 — request.* becomes HTTP-only</a:t>
+              <a:t>Goes away in a future SDv2-for-OneAgent release — request.* becomes HTTP-only</a:t>
             </a:r>
             <a:endParaRPr lang="en-US" sz="2000" dirty="0"/>
           </a:p>
@@ -5653,7 +5653,7 @@
         <p:spPr>
           <a:xfrm>
             <a:off x="457200" y="457200"/>
-            <a:ext cx="8229600" cy="640080"/>
+            <a:ext cx="8229600" cy="914400"/>
           </a:xfrm>
           <a:prstGeom prst="rect">
             <a:avLst/>
@@ -5677,7 +5677,7 @@
                 <a:ea typeface="Segoe UI" pitchFamily="34" charset="-122"/>
                 <a:cs typeface="Segoe UI" pitchFamily="34" charset="-120"/>
               </a:rPr>
-              <a:t>Downstreams are tabs, not entities</a:t>
+              <a:t>Downstream tabs — caller today, real entity tomorrow</a:t>
             </a:r>
             <a:endParaRPr lang="en-US" sz="3600" dirty="0"/>
           </a:p>
@@ -5691,7 +5691,7 @@
         </p:nvSpPr>
         <p:spPr>
           <a:xfrm>
-            <a:off x="457200" y="1188720"/>
+            <a:off x="457200" y="1463040"/>
             <a:ext cx="4114800" cy="54864"/>
           </a:xfrm>
           <a:prstGeom prst="rect">
@@ -5716,7 +5716,7 @@
         </p:nvSpPr>
         <p:spPr>
           <a:xfrm>
-            <a:off x="4572000" y="1188720"/>
+            <a:off x="4572000" y="1463040"/>
             <a:ext cx="4114800" cy="54864"/>
           </a:xfrm>
           <a:prstGeom prst="rect">
@@ -5748,7 +5748,7 @@
           </p:nvPr>
         </p:nvGraphicFramePr>
         <p:xfrm>
-          <a:off x="457200" y="1463040"/>
+          <a:off x="457200" y="1737360"/>
           <a:ext cx="8229600" cy="914400"/>
         </p:xfrm>
         <a:graphic>
@@ -5756,9 +5756,9 @@
             <a:tbl>
               <a:tblPr/>
               <a:tblGrid>
-                <a:gridCol w="1410789"/>
-                <a:gridCol w="2978331"/>
-                <a:gridCol w="3840480"/>
+                <a:gridCol w="1481328"/>
+                <a:gridCol w="3127248"/>
+                <a:gridCol w="3621024"/>
               </a:tblGrid>
               <a:tr h="585216">
                 <a:tc>
@@ -5846,7 +5846,7 @@
                           <a:ea typeface="Segoe UI" pitchFamily="34" charset="-122"/>
                           <a:cs typeface="Segoe UI" pitchFamily="34" charset="-120"/>
                         </a:rPr>
-                        <a:t>Metric family</a:t>
+                        <a:t>Metric family (target)</a:t>
                       </a:r>
                       <a:endParaRPr lang="en-US" sz="1200" dirty="0">
                         <a:latin typeface="Segoe UI" charset="0"/>
@@ -6052,7 +6052,7 @@
                           <a:ea typeface="Segoe UI" pitchFamily="34" charset="-122"/>
                           <a:cs typeface="Segoe UI" pitchFamily="34" charset="-120"/>
                         </a:rPr>
-                        <a:t>dt.service.database.query.*</a:t>
+                        <a:t>dt.service.database.*</a:t>
                       </a:r>
                       <a:endParaRPr lang="en-US" sz="1200" dirty="0">
                         <a:latin typeface="Segoe UI" charset="0"/>
@@ -6120,7 +6120,7 @@
                           <a:ea typeface="Segoe UI" pitchFamily="34" charset="-122"/>
                           <a:cs typeface="Segoe UI" pitchFamily="34" charset="-120"/>
                         </a:rPr>
-                        <a:t>db.system.name, db.operation.name, server.address</a:t>
+                        <a:t>db.system, db.operation.name, server.address</a:t>
                       </a:r>
                       <a:endParaRPr lang="en-US" sz="1200" dirty="0">
                         <a:latin typeface="Segoe UI" charset="0"/>
@@ -6596,8 +6596,8 @@
         </p:nvSpPr>
         <p:spPr>
           <a:xfrm>
-            <a:off x="457200" y="3941064"/>
-            <a:ext cx="8229600" cy="813816"/>
+            <a:off x="457200" y="4215384"/>
+            <a:ext cx="8229600" cy="539496"/>
           </a:xfrm>
           <a:prstGeom prst="rect">
             <a:avLst/>
@@ -6613,29 +6613,15 @@
               <a:buNone/>
             </a:pPr>
             <a:r>
-              <a:rPr lang="en-US" sz="2000" dirty="0">
-                <a:solidFill>
-                  <a:srgbClr val="FFFFFF"/>
+              <a:rPr lang="en-US" sz="2000" b="1" dirty="0">
+                <a:solidFill>
+                  <a:srgbClr val="00A1E0"/>
                 </a:solidFill>
                 <a:latin typeface="Segoe UI" pitchFamily="34" charset="0"/>
                 <a:ea typeface="Segoe UI" pitchFamily="34" charset="-122"/>
                 <a:cs typeface="Segoe UI" pitchFamily="34" charset="-120"/>
               </a:rPr>
-              <a:t>Database identity lives on the JDBC client span, owned by the calling service. Classic's </a:t>
-            </a:r>
-            <a:pPr indent="0" marL="0">
-              <a:buNone/>
-            </a:pPr>
-            <a:r>
-              <a:rPr lang="en-US" sz="1800" dirty="0">
-                <a:solidFill>
-                  <a:srgbClr val="FFFFFF"/>
-                </a:solidFill>
-                <a:latin typeface="Consolas" pitchFamily="34" charset="0"/>
-                <a:ea typeface="Consolas" pitchFamily="34" charset="-122"/>
-                <a:cs typeface="Consolas" pitchFamily="34" charset="-120"/>
-              </a:rPr>
-              <a:t>DATABASE_SERVICE</a:t>
+              <a:t>SDv1:</a:t>
             </a:r>
             <a:pPr indent="0" marL="0">
               <a:buNone/>
@@ -6649,63 +6635,7 @@
                 <a:ea typeface="Segoe UI" pitchFamily="34" charset="-122"/>
                 <a:cs typeface="Segoe UI" pitchFamily="34" charset="-120"/>
               </a:rPr>
-              <a:t> / </a:t>
-            </a:r>
-            <a:pPr indent="0" marL="0">
-              <a:buNone/>
-            </a:pPr>
-            <a:r>
-              <a:rPr lang="en-US" sz="1800" dirty="0">
-                <a:solidFill>
-                  <a:srgbClr val="FFFFFF"/>
-                </a:solidFill>
-                <a:latin typeface="Consolas" pitchFamily="34" charset="0"/>
-                <a:ea typeface="Consolas" pitchFamily="34" charset="-122"/>
-                <a:cs typeface="Consolas" pitchFamily="34" charset="-120"/>
-              </a:rPr>
-              <a:t>MESSAGING_SERVICE</a:t>
-            </a:r>
-            <a:pPr indent="0" marL="0">
-              <a:buNone/>
-            </a:pPr>
-            <a:r>
-              <a:rPr lang="en-US" sz="2000" dirty="0">
-                <a:solidFill>
-                  <a:srgbClr val="FFFFFF"/>
-                </a:solidFill>
-                <a:latin typeface="Segoe UI" pitchFamily="34" charset="0"/>
-                <a:ea typeface="Segoe UI" pitchFamily="34" charset="-122"/>
-                <a:cs typeface="Segoe UI" pitchFamily="34" charset="-120"/>
-              </a:rPr>
-              <a:t> / </a:t>
-            </a:r>
-            <a:pPr indent="0" marL="0">
-              <a:buNone/>
-            </a:pPr>
-            <a:r>
-              <a:rPr lang="en-US" sz="1800" dirty="0">
-                <a:solidFill>
-                  <a:srgbClr val="FFFFFF"/>
-                </a:solidFill>
-                <a:latin typeface="Consolas" pitchFamily="34" charset="0"/>
-                <a:ea typeface="Consolas" pitchFamily="34" charset="-122"/>
-                <a:cs typeface="Consolas" pitchFamily="34" charset="-120"/>
-              </a:rPr>
-              <a:t>EXTERNAL_SERVICE</a:t>
-            </a:r>
-            <a:pPr indent="0" marL="0">
-              <a:buNone/>
-            </a:pPr>
-            <a:r>
-              <a:rPr lang="en-US" sz="2000" dirty="0">
-                <a:solidFill>
-                  <a:srgbClr val="FFFFFF"/>
-                </a:solidFill>
-                <a:latin typeface="Segoe UI" pitchFamily="34" charset="0"/>
-                <a:ea typeface="Segoe UI" pitchFamily="34" charset="-122"/>
-                <a:cs typeface="Segoe UI" pitchFamily="34" charset="-120"/>
-              </a:rPr>
-              <a:t> entities are gone — relocation, not removal.</a:t>
+              <a:t> measures the client-side call and labels it "the database." Latency is the round-trip from the caller — not what's happening inside Postgres.</a:t>
             </a:r>
             <a:endParaRPr lang="en-US" sz="2000" dirty="0"/>
           </a:p>
@@ -7507,7 +7437,7 @@
         <p:spPr>
           <a:xfrm>
             <a:off x="457200" y="1463040"/>
-            <a:ext cx="8229600" cy="3154680"/>
+            <a:ext cx="8229600" cy="3291840"/>
           </a:xfrm>
           <a:prstGeom prst="rect">
             <a:avLst/>
@@ -7623,31 +7553,13 @@
             </a:r>
             <a:endParaRPr lang="en-US" sz="2000" dirty="0"/>
           </a:p>
-        </p:txBody>
-      </p:sp>
-      <p:sp>
-        <p:nvSpPr>
-          <p:cNvPr id="6" name="Text 4"/>
-          <p:cNvSpPr/>
-          <p:nvPr/>
-        </p:nvSpPr>
-        <p:spPr>
-          <a:xfrm>
-            <a:off x="457200" y="4754880"/>
-            <a:ext cx="8229600" cy="0"/>
-          </a:xfrm>
-          <a:prstGeom prst="rect">
-            <a:avLst/>
-          </a:prstGeom>
-          <a:noFill/>
-          <a:ln/>
-        </p:spPr>
-        <p:txBody>
-          <a:bodyPr wrap="square" lIns="0" tIns="0" rIns="0" bIns="0" rtlCol="0" anchor="t"/>
-          <a:lstStyle/>
-          <a:p>
-            <a:pPr indent="0" marL="0">
-              <a:buNone/>
+          <a:p>
+            <a:pPr marL="342900" indent="-342900">
+              <a:lnSpc>
+                <a:spcPct val="120000"/>
+              </a:lnSpc>
+              <a:buSzPct val="100000"/>
+              <a:buChar char="•"/>
             </a:pPr>
             <a:r>
               <a:rPr lang="en-US" sz="2000" dirty="0">
@@ -7658,7 +7570,28 @@
                 <a:ea typeface="Segoe UI" pitchFamily="34" charset="-122"/>
                 <a:cs typeface="Segoe UI" pitchFamily="34" charset="-120"/>
               </a:rPr>
-              <a:t>*Direction firm, timing not — road shape, not arrival date.*</a:t>
+              <a:t>dt.service.database.* linked to real DB entities — future SDv2-for-OneAgent release; span data is already shaped correctly</a:t>
+            </a:r>
+            <a:endParaRPr lang="en-US" sz="2000" dirty="0"/>
+          </a:p>
+          <a:p>
+            <a:pPr marL="342900" indent="-342900">
+              <a:lnSpc>
+                <a:spcPct val="120000"/>
+              </a:lnSpc>
+              <a:buSzPct val="100000"/>
+              <a:buChar char="•"/>
+            </a:pPr>
+            <a:r>
+              <a:rPr lang="en-US" sz="2000" dirty="0">
+                <a:solidFill>
+                  <a:srgbClr val="FFFFFF"/>
+                </a:solidFill>
+                <a:latin typeface="Segoe UI" pitchFamily="34" charset="0"/>
+                <a:ea typeface="Segoe UI" pitchFamily="34" charset="-122"/>
+                <a:cs typeface="Segoe UI" pitchFamily="34" charset="-120"/>
+              </a:rPr>
+              <a:t>Messaging → broker entity — same idea, further out</a:t>
             </a:r>
             <a:endParaRPr lang="en-US" sz="2000" dirty="0"/>
           </a:p>
@@ -8938,7 +8871,7 @@
         <p:spPr>
           <a:xfrm>
             <a:off x="457200" y="1463040"/>
-            <a:ext cx="8229600" cy="1554480"/>
+            <a:ext cx="8229600" cy="1097280"/>
           </a:xfrm>
           <a:prstGeom prst="rect">
             <a:avLst/>
@@ -9004,41 +8937,7 @@
                 <a:ea typeface="Consolas" pitchFamily="34" charset="-122"/>
                 <a:cs typeface="Consolas" pitchFamily="34" charset="-120"/>
               </a:rPr>
-              <a:t>  --write-id --share-environment</a:t>
-            </a:r>
-            <a:endParaRPr lang="en-US" sz="1100" dirty="0"/>
-          </a:p>
-          <a:p>
-            <a:pPr indent="0" marL="0">
-              <a:buNone/>
-            </a:pPr>
-            <a:r>
-              <a:rPr lang="en-US" sz="1100" dirty="0">
-                <a:solidFill>
-                  <a:srgbClr val="FFFFFF"/>
-                </a:solidFill>
-                <a:latin typeface="Consolas" pitchFamily="34" charset="0"/>
-                <a:ea typeface="Consolas" pitchFamily="34" charset="-122"/>
-                <a:cs typeface="Consolas" pitchFamily="34" charset="-120"/>
-              </a:rPr>
-              <a:t>dtctl apply -f notebooks/home.yaml \</a:t>
-            </a:r>
-            <a:endParaRPr lang="en-US" sz="1100" dirty="0"/>
-          </a:p>
-          <a:p>
-            <a:pPr indent="0" marL="0">
-              <a:buNone/>
-            </a:pPr>
-            <a:r>
-              <a:rPr lang="en-US" sz="1100" dirty="0">
-                <a:solidFill>
-                  <a:srgbClr val="FFFFFF"/>
-                </a:solidFill>
-                <a:latin typeface="Consolas" pitchFamily="34" charset="0"/>
-                <a:ea typeface="Consolas" pitchFamily="34" charset="-122"/>
-                <a:cs typeface="Consolas" pitchFamily="34" charset="-120"/>
-              </a:rPr>
-              <a:t>  --write-id --share-environment</a:t>
+              <a:t>  --share-environment</a:t>
             </a:r>
             <a:endParaRPr lang="en-US" sz="1100" dirty="0"/>
           </a:p>
@@ -9052,8 +8951,8 @@
         </p:nvSpPr>
         <p:spPr>
           <a:xfrm>
-            <a:off x="457200" y="3154680"/>
-            <a:ext cx="8229600" cy="1600200"/>
+            <a:off x="457200" y="2697480"/>
+            <a:ext cx="8229600" cy="1691640"/>
           </a:xfrm>
           <a:prstGeom prst="rect">
             <a:avLst/>
@@ -9081,7 +8980,7 @@
                 <a:ea typeface="Segoe UI" pitchFamily="34" charset="-122"/>
                 <a:cs typeface="Segoe UI" pitchFamily="34" charset="-120"/>
               </a:rPr>
-              <a:t>One unified sdv2-demo.yaml — ten DQL questions covering both sections</a:t>
+              <a:t>One notebook: preamble + tenant-health check + 10 DQL questions</a:t>
             </a:r>
             <a:endParaRPr lang="en-US" sz="2000" dirty="0"/>
           </a:p>
@@ -9102,7 +9001,7 @@
                 <a:ea typeface="Segoe UI" pitchFamily="34" charset="-122"/>
                 <a:cs typeface="Segoe UI" pitchFamily="34" charset="-120"/>
               </a:rPr>
-              <a:t>Plus home.yaml — a landing notebook linking each section to its DQL questions</a:t>
+              <a:t>YAML carries the UUID, so re-applies update in place</a:t>
             </a:r>
             <a:endParaRPr lang="en-US" sz="2000" dirty="0"/>
           </a:p>
@@ -9123,7 +9022,7 @@
                 <a:ea typeface="Segoe UI" pitchFamily="34" charset="-122"/>
                 <a:cs typeface="Segoe UI" pitchFamily="34" charset="-120"/>
               </a:rPr>
-              <a:t>Open the Notebooks app, filter by SDv2 demo, open the demo and run question 1</a:t>
+              <a:t>Open the Notebooks app, filter by SDv2 demo, run the preamble check, then questions 1-10</a:t>
             </a:r>
             <a:endParaRPr lang="en-US" sz="2000" dirty="0"/>
           </a:p>

--- a/presentation/sdv2-presentation.pptx
+++ b/presentation/sdv2-presentation.pptx
@@ -26,9 +26,10 @@
     <p:sldId id="274" r:id="rId20"/>
     <p:sldId id="275" r:id="rId21"/>
     <p:sldId id="276" r:id="rId22"/>
+    <p:sldId id="277" r:id="rId23"/>
   </p:sldIdLst>
   <p:notesMasterIdLst>
-    <p:notesMasterId r:id="rId23"/>
+    <p:notesMasterId r:id="rId24"/>
   </p:notesMasterIdLst>
   <p:sldSz cx="9144000" cy="5143500"/>
   <p:notesSz cx="5143500" cy="9144000"/>
@@ -1690,6 +1691,94 @@
             <a:fld id="{F7021451-1387-4CA6-816F-3879F97B5CBC}" type="slidenum">
               <a:rPr lang="en-US"/>
               <a:t>21</a:t>
+            </a:fld>
+            <a:endParaRPr lang="en-US"/>
+          </a:p>
+        </p:txBody>
+      </p:sp>
+    </p:spTree>
+    <p:extLst>
+      <p:ext uri="{BB962C8B-B14F-4D97-AF65-F5344CB8AC3E}">
+        <p14:creationId xmlns:p14="http://schemas.microsoft.com/office/powerpoint/2010/main" val="1024086991"/>
+      </p:ext>
+    </p:extLst>
+  </p:cSld>
+  <p:clrMapOvr>
+    <a:masterClrMapping/>
+  </p:clrMapOvr>
+</p:notes>
+</file>
+
+<file path=ppt/notesSlides/notesSlide22.xml><?xml version="1.0" encoding="utf-8"?>
+<p:notes xmlns:a="http://schemas.openxmlformats.org/drawingml/2006/main" xmlns:r="http://schemas.openxmlformats.org/officeDocument/2006/relationships" xmlns:p="http://schemas.openxmlformats.org/presentationml/2006/main">
+  <p:cSld>
+    <p:spTree>
+      <p:nvGrpSpPr>
+        <p:cNvPr id="1" name=""/>
+        <p:cNvGrpSpPr/>
+        <p:nvPr/>
+      </p:nvGrpSpPr>
+      <p:grpSpPr>
+        <a:xfrm>
+          <a:off x="0" y="0"/>
+          <a:ext cx="0" cy="0"/>
+          <a:chOff x="0" y="0"/>
+          <a:chExt cx="0" cy="0"/>
+        </a:xfrm>
+      </p:grpSpPr>
+      <p:sp>
+        <p:nvSpPr>
+          <p:cNvPr id="2" name="Slide Image Placeholder 1"/>
+          <p:cNvSpPr>
+            <a:spLocks noGrp="1" noRot="1" noChangeAspect="1"/>
+          </p:cNvSpPr>
+          <p:nvPr>
+            <p:ph type="sldImg"/>
+          </p:nvPr>
+        </p:nvSpPr>
+        <p:spPr/>
+      </p:sp>
+      <p:sp>
+        <p:nvSpPr>
+          <p:cNvPr id="3" name="Notes Placeholder 2"/>
+          <p:cNvSpPr>
+            <a:spLocks noGrp="1"/>
+          </p:cNvSpPr>
+          <p:nvPr>
+            <p:ph type="body" idx="1"/>
+          </p:nvPr>
+        </p:nvSpPr>
+        <p:spPr/>
+        <p:txBody>
+          <a:bodyPr/>
+          <a:lstStyle/>
+          <a:p>
+            <a:r>
+              <a:rPr lang="en-US" dirty="0"/>
+              <a:t/>
+            </a:r>
+            <a:endParaRPr lang="en-US" dirty="0"/>
+          </a:p>
+        </p:txBody>
+      </p:sp>
+      <p:sp>
+        <p:nvSpPr>
+          <p:cNvPr id="4" name="Slide Number Placeholder 3"/>
+          <p:cNvSpPr>
+            <a:spLocks noGrp="1"/>
+          </p:cNvSpPr>
+          <p:nvPr>
+            <p:ph type="sldNum" sz="quarter" idx="10"/>
+          </p:nvPr>
+        </p:nvSpPr>
+        <p:spPr/>
+        <p:txBody>
+          <a:bodyPr/>
+          <a:lstStyle/>
+          <a:p>
+            <a:fld id="{F7021451-1387-4CA6-816F-3879F97B5CBC}" type="slidenum">
+              <a:rPr lang="en-US"/>
+              <a:t>22</a:t>
             </a:fld>
             <a:endParaRPr lang="en-US"/>
           </a:p>
@@ -6675,7 +6764,7 @@
         <p:spPr>
           <a:xfrm>
             <a:off x="457200" y="457200"/>
-            <a:ext cx="8229600" cy="640080"/>
+            <a:ext cx="8229600" cy="914400"/>
           </a:xfrm>
           <a:prstGeom prst="rect">
             <a:avLst/>
@@ -6699,7 +6788,7 @@
                 <a:ea typeface="Segoe UI" pitchFamily="34" charset="-122"/>
                 <a:cs typeface="Segoe UI" pitchFamily="34" charset="-120"/>
               </a:rPr>
-              <a:t>`endpoint.name` and the `GET /*` reality</a:t>
+              <a:t>Source view vs. client view — already possible today</a:t>
             </a:r>
             <a:endParaRPr lang="en-US" sz="3600" dirty="0"/>
           </a:p>
@@ -6713,7 +6802,7 @@
         </p:nvSpPr>
         <p:spPr>
           <a:xfrm>
-            <a:off x="457200" y="1188720"/>
+            <a:off x="457200" y="1463040"/>
             <a:ext cx="4114800" cy="54864"/>
           </a:xfrm>
           <a:prstGeom prst="rect">
@@ -6738,7 +6827,7 @@
         </p:nvSpPr>
         <p:spPr>
           <a:xfrm>
-            <a:off x="4572000" y="1188720"/>
+            <a:off x="4572000" y="1463040"/>
             <a:ext cx="4114800" cy="54864"/>
           </a:xfrm>
           <a:prstGeom prst="rect">
@@ -6763,8 +6852,8 @@
         </p:nvSpPr>
         <p:spPr>
           <a:xfrm>
-            <a:off x="457200" y="1463040"/>
-            <a:ext cx="8229600" cy="1691640"/>
+            <a:off x="457200" y="1737360"/>
+            <a:ext cx="8229600" cy="1527048"/>
           </a:xfrm>
           <a:prstGeom prst="rect">
             <a:avLst/>
@@ -6776,12 +6865,8 @@
           <a:bodyPr wrap="square" lIns="0" tIns="0" rIns="0" bIns="0" rtlCol="0" anchor="t"/>
           <a:lstStyle/>
           <a:p>
-            <a:pPr marL="342900" indent="-342900">
-              <a:lnSpc>
-                <a:spcPct val="120000"/>
-              </a:lnSpc>
-              <a:buSzPct val="100000"/>
-              <a:buChar char="•"/>
+            <a:pPr indent="0" marL="0">
+              <a:buNone/>
             </a:pPr>
             <a:r>
               <a:rPr lang="en-US" sz="2000" dirty="0">
@@ -6792,38 +6877,24 @@
                 <a:ea typeface="Segoe UI" pitchFamily="34" charset="-122"/>
                 <a:cs typeface="Segoe UI" pitchFamily="34" charset="-120"/>
               </a:rPr>
-              <a:t>endpoint.name derives from http.route on server spans</a:t>
-            </a:r>
-            <a:endParaRPr lang="en-US" sz="2000" dirty="0"/>
-          </a:p>
-          <a:p>
-            <a:pPr marL="342900" indent="-342900">
-              <a:lnSpc>
-                <a:spcPct val="120000"/>
-              </a:lnSpc>
-              <a:buSzPct val="100000"/>
-              <a:buChar char="•"/>
-            </a:pPr>
-            <a:r>
-              <a:rPr lang="en-US" sz="2000" dirty="0">
-                <a:solidFill>
-                  <a:srgbClr val="FFFFFF"/>
+              <a:t>You don't have to wait for SDv2-for-OneAgent's topology linking to </a:t>
+            </a:r>
+            <a:pPr indent="0" marL="0">
+              <a:buNone/>
+            </a:pPr>
+            <a:r>
+              <a:rPr lang="en-US" sz="2000" b="1" dirty="0">
+                <a:solidFill>
+                  <a:srgbClr val="00A1E0"/>
                 </a:solidFill>
                 <a:latin typeface="Segoe UI" pitchFamily="34" charset="0"/>
                 <a:ea typeface="Segoe UI" pitchFamily="34" charset="-122"/>
                 <a:cs typeface="Segoe UI" pitchFamily="34" charset="-120"/>
               </a:rPr>
-              <a:t>If http.route isn't set → fallback to &lt;METHOD&gt; /*</a:t>
-            </a:r>
-            <a:endParaRPr lang="en-US" sz="2000" dirty="0"/>
-          </a:p>
-          <a:p>
-            <a:pPr marL="342900" indent="-342900">
-              <a:lnSpc>
-                <a:spcPct val="120000"/>
-              </a:lnSpc>
-              <a:buSzPct val="100000"/>
-              <a:buChar char="•"/>
+              <a:t>see</a:t>
+            </a:r>
+            <a:pPr indent="0" marL="0">
+              <a:buNone/>
             </a:pPr>
             <a:r>
               <a:rPr lang="en-US" sz="2000" dirty="0">
@@ -6834,167 +6905,661 @@
                 <a:ea typeface="Segoe UI" pitchFamily="34" charset="-122"/>
                 <a:cs typeface="Segoe UI" pitchFamily="34" charset="-120"/>
               </a:rPr>
-              <a:t>Spring MVC + OneAgent + orders-demo today → every endpoint is GET /*</a:t>
+              <a:t> the source-vs-client split. Stand up a standard Prometheus exporter or use a OneAgent built-in sensor, and the "real entity" view exists alongside the client-span view right now.</a:t>
             </a:r>
             <a:endParaRPr lang="en-US" sz="2000" dirty="0"/>
           </a:p>
-          <a:p>
-            <a:pPr marL="342900" indent="-342900">
-              <a:lnSpc>
-                <a:spcPct val="120000"/>
-              </a:lnSpc>
-              <a:buSzPct val="100000"/>
-              <a:buChar char="•"/>
-            </a:pPr>
-            <a:r>
-              <a:rPr lang="en-US" sz="2000" dirty="0">
-                <a:solidFill>
-                  <a:srgbClr val="FFFFFF"/>
-                </a:solidFill>
-                <a:latin typeface="Segoe UI" pitchFamily="34" charset="0"/>
-                <a:ea typeface="Segoe UI" pitchFamily="34" charset="-122"/>
-                <a:cs typeface="Segoe UI" pitchFamily="34" charset="-120"/>
-              </a:rPr>
-              <a:t>Throughput and latency are still right. The labels are wrong.</a:t>
-            </a:r>
-            <a:endParaRPr lang="en-US" sz="2000" dirty="0"/>
-          </a:p>
         </p:txBody>
       </p:sp>
-      <p:sp>
-        <p:nvSpPr>
-          <p:cNvPr id="6" name="Text 4"/>
-          <p:cNvSpPr/>
-          <p:nvPr/>
-        </p:nvSpPr>
-        <p:spPr>
-          <a:xfrm>
-            <a:off x="457200" y="3291840"/>
-            <a:ext cx="8229600" cy="832104"/>
-          </a:xfrm>
-          <a:prstGeom prst="rect">
-            <a:avLst/>
-          </a:prstGeom>
-          <a:noFill/>
-          <a:ln/>
-        </p:spPr>
-        <p:txBody>
-          <a:bodyPr wrap="square" lIns="0" tIns="0" rIns="0" bIns="0" rtlCol="0" anchor="t"/>
-          <a:lstStyle/>
-          <a:p>
-            <a:pPr indent="0" marL="0">
-              <a:buNone/>
-            </a:pPr>
-            <a:r>
-              <a:rPr lang="en-US" sz="2000" b="1" dirty="0">
-                <a:solidFill>
-                  <a:srgbClr val="00A1E0"/>
-                </a:solidFill>
-                <a:latin typeface="Segoe UI" pitchFamily="34" charset="0"/>
-                <a:ea typeface="Segoe UI" pitchFamily="34" charset="-122"/>
-                <a:cs typeface="Segoe UI" pitchFamily="34" charset="-120"/>
-              </a:rPr>
-              <a:t>Fix today:</a:t>
-            </a:r>
-            <a:pPr indent="0" marL="0">
-              <a:buNone/>
-            </a:pPr>
-            <a:r>
-              <a:rPr lang="en-US" sz="2000" dirty="0">
-                <a:solidFill>
-                  <a:srgbClr val="FFFFFF"/>
-                </a:solidFill>
-                <a:latin typeface="Segoe UI" pitchFamily="34" charset="0"/>
-                <a:ea typeface="Segoe UI" pitchFamily="34" charset="-122"/>
-                <a:cs typeface="Segoe UI" pitchFamily="34" charset="-120"/>
-              </a:rPr>
-              <a:t> Settings → Service detection → URL path pattern matching (SDv1 and SDv2).</a:t>
-            </a:r>
-            <a:endParaRPr lang="en-US" sz="2000" dirty="0"/>
-          </a:p>
-        </p:txBody>
-      </p:sp>
-      <p:sp>
-        <p:nvSpPr>
-          <p:cNvPr id="7" name="Text 5"/>
-          <p:cNvSpPr/>
-          <p:nvPr/>
-        </p:nvSpPr>
-        <p:spPr>
-          <a:xfrm>
-            <a:off x="457200" y="4306824"/>
-            <a:ext cx="8229600" cy="448056"/>
-          </a:xfrm>
-          <a:prstGeom prst="rect">
-            <a:avLst/>
-          </a:prstGeom>
-          <a:noFill/>
-          <a:ln/>
-        </p:spPr>
-        <p:txBody>
-          <a:bodyPr wrap="square" lIns="0" tIns="0" rIns="0" bIns="0" rtlCol="0" anchor="t"/>
-          <a:lstStyle/>
-          <a:p>
-            <a:pPr indent="0" marL="0">
-              <a:buNone/>
-            </a:pPr>
-            <a:r>
-              <a:rPr lang="en-US" sz="2000" b="1" dirty="0">
-                <a:solidFill>
-                  <a:srgbClr val="00A1E0"/>
-                </a:solidFill>
-                <a:latin typeface="Segoe UI" pitchFamily="34" charset="0"/>
-                <a:ea typeface="Segoe UI" pitchFamily="34" charset="-122"/>
-                <a:cs typeface="Segoe UI" pitchFamily="34" charset="-120"/>
-              </a:rPr>
-              <a:t>Automatic URL normalization coming.</a:t>
-            </a:r>
-            <a:pPr indent="0" marL="0">
-              <a:buNone/>
-            </a:pPr>
-            <a:r>
-              <a:rPr lang="en-US" sz="2000" dirty="0">
-                <a:solidFill>
-                  <a:srgbClr val="FFFFFF"/>
-                </a:solidFill>
-                <a:latin typeface="Segoe UI" pitchFamily="34" charset="0"/>
-                <a:ea typeface="Segoe UI" pitchFamily="34" charset="-122"/>
-                <a:cs typeface="Segoe UI" pitchFamily="34" charset="-120"/>
-              </a:rPr>
-              <a:t> Derives </a:t>
-            </a:r>
-            <a:pPr indent="0" marL="0">
-              <a:buNone/>
-            </a:pPr>
-            <a:r>
-              <a:rPr lang="en-US" sz="1800" dirty="0">
-                <a:solidFill>
-                  <a:srgbClr val="FFFFFF"/>
-                </a:solidFill>
-                <a:latin typeface="Consolas" pitchFamily="34" charset="0"/>
-                <a:ea typeface="Consolas" pitchFamily="34" charset="-122"/>
-                <a:cs typeface="Consolas" pitchFamily="34" charset="-120"/>
-              </a:rPr>
-              <a:t>http.route</a:t>
-            </a:r>
-            <a:pPr indent="0" marL="0">
-              <a:buNone/>
-            </a:pPr>
-            <a:r>
-              <a:rPr lang="en-US" sz="2000" dirty="0">
-                <a:solidFill>
-                  <a:srgbClr val="FFFFFF"/>
-                </a:solidFill>
-                <a:latin typeface="Segoe UI" pitchFamily="34" charset="0"/>
-                <a:ea typeface="Segoe UI" pitchFamily="34" charset="-122"/>
-                <a:cs typeface="Segoe UI" pitchFamily="34" charset="-120"/>
-              </a:rPr>
-              <a:t> by truncating at the first volatile segment (IDs, hashes, UUIDs). Classic-first rollout; SDv2 opt-in then default.</a:t>
-            </a:r>
-            <a:endParaRPr lang="en-US" sz="2000" dirty="0"/>
-          </a:p>
-        </p:txBody>
-      </p:sp>
+      <p:graphicFrame>
+        <p:nvGraphicFramePr>
+          <p:cNvPr id="18" name="Table 0"/>
+          <p:cNvGraphicFramePr>
+            <a:graphicFrameLocks noGrp="1"/>
+          </p:cNvGraphicFramePr>
+          <p:nvPr>
+            <p:extLst>
+              <p:ext uri="{D42A27DB-BD31-4B8C-83A1-F6EECF244321}">
+                <p14:modId xmlns:p14="http://schemas.microsoft.com/office/powerpoint/2010/main" val="1579011935"/>
+              </p:ext>
+            </p:extLst>
+          </p:nvPr>
+        </p:nvGraphicFramePr>
+        <p:xfrm>
+          <a:off x="457200" y="3447288"/>
+          <a:ext cx="8229600" cy="914400"/>
+        </p:xfrm>
+        <a:graphic>
+          <a:graphicData uri="http://schemas.openxmlformats.org/drawingml/2006/table">
+            <a:tbl>
+              <a:tblPr/>
+              <a:tblGrid>
+                <a:gridCol w="1016337"/>
+                <a:gridCol w="3632211"/>
+                <a:gridCol w="3581053"/>
+              </a:tblGrid>
+              <a:tr h="786384">
+                <a:tc>
+                  <a:txBody>
+                    <a:bodyPr/>
+                    <a:lstStyle/>
+                    <a:p>
+                      <a:pPr indent="0" marL="0">
+                        <a:buNone/>
+                      </a:pPr>
+                      <a:r>
+                        <a:rPr lang="en-US" sz="1200" b="1" dirty="0">
+                          <a:solidFill>
+                            <a:srgbClr val="FFFFFF"/>
+                          </a:solidFill>
+                          <a:latin typeface="Segoe UI" pitchFamily="34" charset="0"/>
+                          <a:ea typeface="Segoe UI" pitchFamily="34" charset="-122"/>
+                          <a:cs typeface="Segoe UI" pitchFamily="34" charset="-120"/>
+                        </a:rPr>
+                        <a:t>Target</a:t>
+                      </a:r>
+                      <a:endParaRPr lang="en-US" sz="1200" dirty="0">
+                        <a:latin typeface="Segoe UI" charset="0"/>
+                        <a:ea typeface="Segoe UI" charset="0"/>
+                        <a:cs typeface="Segoe UI" charset="0"/>
+                      </a:endParaRPr>
+                    </a:p>
+                  </a:txBody>
+                  <a:tcPr marL="91440" marR="91440" marT="45720" marB="45720" anchor="ctr">
+                    <a:lnL w="0" cap="flat" cmpd="sng" algn="ctr">
+                      <a:solidFill>
+                        <a:srgbClr val="0A0A14"/>
+                      </a:solidFill>
+                      <a:prstDash val="solid"/>
+                      <a:round/>
+                      <a:headEnd type="none" w="med" len="med"/>
+                      <a:tailEnd type="none" w="med" len="med"/>
+                    </a:lnL>
+                    <a:lnR w="0" cap="flat" cmpd="sng" algn="ctr">
+                      <a:solidFill>
+                        <a:srgbClr val="0A0A14"/>
+                      </a:solidFill>
+                      <a:prstDash val="solid"/>
+                      <a:round/>
+                      <a:headEnd type="none" w="med" len="med"/>
+                      <a:tailEnd type="none" w="med" len="med"/>
+                    </a:lnR>
+                    <a:lnT w="0" cap="flat" cmpd="sng" algn="ctr">
+                      <a:solidFill>
+                        <a:srgbClr val="0A0A14"/>
+                      </a:solidFill>
+                      <a:prstDash val="solid"/>
+                      <a:round/>
+                      <a:headEnd type="none" w="med" len="med"/>
+                      <a:tailEnd type="none" w="med" len="med"/>
+                    </a:lnT>
+                    <a:lnB w="12700" cap="flat" cmpd="sng" algn="ctr">
+                      <a:solidFill>
+                        <a:srgbClr val="2A2A3E"/>
+                      </a:solidFill>
+                      <a:prstDash val="solid"/>
+                      <a:round/>
+                      <a:headEnd type="none" w="med" len="med"/>
+                      <a:tailEnd type="none" w="med" len="med"/>
+                    </a:lnB>
+                    <a:solidFill>
+                      <a:srgbClr val="0A0A14"/>
+                    </a:solidFill>
+                  </a:tcPr>
+                </a:tc>
+                <a:tc>
+                  <a:txBody>
+                    <a:bodyPr/>
+                    <a:lstStyle/>
+                    <a:p>
+                      <a:pPr indent="0" marL="0">
+                        <a:buNone/>
+                      </a:pPr>
+                      <a:r>
+                        <a:rPr lang="en-US" sz="1200" b="1" dirty="0">
+                          <a:solidFill>
+                            <a:srgbClr val="FFFFFF"/>
+                          </a:solidFill>
+                          <a:latin typeface="Segoe UI" pitchFamily="34" charset="0"/>
+                          <a:ea typeface="Segoe UI" pitchFamily="34" charset="-122"/>
+                          <a:cs typeface="Segoe UI" pitchFamily="34" charset="-120"/>
+                        </a:rPr>
+                        <a:t>Source-view path today</a:t>
+                      </a:r>
+                      <a:endParaRPr lang="en-US" sz="1200" dirty="0">
+                        <a:latin typeface="Segoe UI" charset="0"/>
+                        <a:ea typeface="Segoe UI" charset="0"/>
+                        <a:cs typeface="Segoe UI" charset="0"/>
+                      </a:endParaRPr>
+                    </a:p>
+                  </a:txBody>
+                  <a:tcPr marL="91440" marR="91440" marT="45720" marB="45720" anchor="ctr">
+                    <a:lnL w="0" cap="flat" cmpd="sng" algn="ctr">
+                      <a:solidFill>
+                        <a:srgbClr val="0A0A14"/>
+                      </a:solidFill>
+                      <a:prstDash val="solid"/>
+                      <a:round/>
+                      <a:headEnd type="none" w="med" len="med"/>
+                      <a:tailEnd type="none" w="med" len="med"/>
+                    </a:lnL>
+                    <a:lnR w="0" cap="flat" cmpd="sng" algn="ctr">
+                      <a:solidFill>
+                        <a:srgbClr val="0A0A14"/>
+                      </a:solidFill>
+                      <a:prstDash val="solid"/>
+                      <a:round/>
+                      <a:headEnd type="none" w="med" len="med"/>
+                      <a:tailEnd type="none" w="med" len="med"/>
+                    </a:lnR>
+                    <a:lnT w="0" cap="flat" cmpd="sng" algn="ctr">
+                      <a:solidFill>
+                        <a:srgbClr val="0A0A14"/>
+                      </a:solidFill>
+                      <a:prstDash val="solid"/>
+                      <a:round/>
+                      <a:headEnd type="none" w="med" len="med"/>
+                      <a:tailEnd type="none" w="med" len="med"/>
+                    </a:lnT>
+                    <a:lnB w="12700" cap="flat" cmpd="sng" algn="ctr">
+                      <a:solidFill>
+                        <a:srgbClr val="2A2A3E"/>
+                      </a:solidFill>
+                      <a:prstDash val="solid"/>
+                      <a:round/>
+                      <a:headEnd type="none" w="med" len="med"/>
+                      <a:tailEnd type="none" w="med" len="med"/>
+                    </a:lnB>
+                    <a:solidFill>
+                      <a:srgbClr val="0A0A14"/>
+                    </a:solidFill>
+                  </a:tcPr>
+                </a:tc>
+                <a:tc>
+                  <a:txBody>
+                    <a:bodyPr/>
+                    <a:lstStyle/>
+                    <a:p>
+                      <a:pPr indent="0" marL="0">
+                        <a:buNone/>
+                      </a:pPr>
+                      <a:r>
+                        <a:rPr lang="en-US" sz="1200" b="1" dirty="0">
+                          <a:solidFill>
+                            <a:srgbClr val="FFFFFF"/>
+                          </a:solidFill>
+                          <a:latin typeface="Segoe UI" pitchFamily="34" charset="0"/>
+                          <a:ea typeface="Segoe UI" pitchFamily="34" charset="-122"/>
+                          <a:cs typeface="Segoe UI" pitchFamily="34" charset="-120"/>
+                        </a:rPr>
+                        <a:t>Example metrics</a:t>
+                      </a:r>
+                      <a:endParaRPr lang="en-US" sz="1200" dirty="0">
+                        <a:latin typeface="Segoe UI" charset="0"/>
+                        <a:ea typeface="Segoe UI" charset="0"/>
+                        <a:cs typeface="Segoe UI" charset="0"/>
+                      </a:endParaRPr>
+                    </a:p>
+                  </a:txBody>
+                  <a:tcPr marL="91440" marR="91440" marT="45720" marB="45720" anchor="ctr">
+                    <a:lnL w="0" cap="flat" cmpd="sng" algn="ctr">
+                      <a:solidFill>
+                        <a:srgbClr val="0A0A14"/>
+                      </a:solidFill>
+                      <a:prstDash val="solid"/>
+                      <a:round/>
+                      <a:headEnd type="none" w="med" len="med"/>
+                      <a:tailEnd type="none" w="med" len="med"/>
+                    </a:lnL>
+                    <a:lnR w="0" cap="flat" cmpd="sng" algn="ctr">
+                      <a:solidFill>
+                        <a:srgbClr val="0A0A14"/>
+                      </a:solidFill>
+                      <a:prstDash val="solid"/>
+                      <a:round/>
+                      <a:headEnd type="none" w="med" len="med"/>
+                      <a:tailEnd type="none" w="med" len="med"/>
+                    </a:lnR>
+                    <a:lnT w="0" cap="flat" cmpd="sng" algn="ctr">
+                      <a:solidFill>
+                        <a:srgbClr val="0A0A14"/>
+                      </a:solidFill>
+                      <a:prstDash val="solid"/>
+                      <a:round/>
+                      <a:headEnd type="none" w="med" len="med"/>
+                      <a:tailEnd type="none" w="med" len="med"/>
+                    </a:lnT>
+                    <a:lnB w="12700" cap="flat" cmpd="sng" algn="ctr">
+                      <a:solidFill>
+                        <a:srgbClr val="2A2A3E"/>
+                      </a:solidFill>
+                      <a:prstDash val="solid"/>
+                      <a:round/>
+                      <a:headEnd type="none" w="med" len="med"/>
+                      <a:tailEnd type="none" w="med" len="med"/>
+                    </a:lnB>
+                    <a:solidFill>
+                      <a:srgbClr val="0A0A14"/>
+                    </a:solidFill>
+                  </a:tcPr>
+                </a:tc>
+              </a:tr>
+              <a:tr h="786384">
+                <a:tc>
+                  <a:txBody>
+                    <a:bodyPr/>
+                    <a:lstStyle/>
+                    <a:p>
+                      <a:pPr indent="0" marL="0">
+                        <a:buNone/>
+                      </a:pPr>
+                      <a:r>
+                        <a:rPr lang="en-US" sz="1200" dirty="0">
+                          <a:solidFill>
+                            <a:srgbClr val="FFFFFF"/>
+                          </a:solidFill>
+                          <a:latin typeface="Segoe UI" pitchFamily="34" charset="0"/>
+                          <a:ea typeface="Segoe UI" pitchFamily="34" charset="-122"/>
+                          <a:cs typeface="Segoe UI" pitchFamily="34" charset="-120"/>
+                        </a:rPr>
+                        <a:t>Postgres</a:t>
+                      </a:r>
+                      <a:endParaRPr lang="en-US" sz="1200" dirty="0">
+                        <a:latin typeface="Segoe UI" charset="0"/>
+                        <a:ea typeface="Segoe UI" charset="0"/>
+                        <a:cs typeface="Segoe UI" charset="0"/>
+                      </a:endParaRPr>
+                    </a:p>
+                  </a:txBody>
+                  <a:tcPr marL="91440" marR="91440" marT="45720" marB="45720" anchor="ctr">
+                    <a:lnL w="0" cap="flat" cmpd="sng" algn="ctr">
+                      <a:solidFill>
+                        <a:srgbClr val="0A0A14"/>
+                      </a:solidFill>
+                      <a:prstDash val="solid"/>
+                      <a:round/>
+                      <a:headEnd type="none" w="med" len="med"/>
+                      <a:tailEnd type="none" w="med" len="med"/>
+                    </a:lnL>
+                    <a:lnR w="0" cap="flat" cmpd="sng" algn="ctr">
+                      <a:solidFill>
+                        <a:srgbClr val="0A0A14"/>
+                      </a:solidFill>
+                      <a:prstDash val="solid"/>
+                      <a:round/>
+                      <a:headEnd type="none" w="med" len="med"/>
+                      <a:tailEnd type="none" w="med" len="med"/>
+                    </a:lnR>
+                    <a:lnT w="0" cap="flat" cmpd="sng" algn="ctr">
+                      <a:solidFill>
+                        <a:srgbClr val="0A0A14"/>
+                      </a:solidFill>
+                      <a:prstDash val="solid"/>
+                      <a:round/>
+                      <a:headEnd type="none" w="med" len="med"/>
+                      <a:tailEnd type="none" w="med" len="med"/>
+                    </a:lnT>
+                    <a:lnB w="6350" cap="flat" cmpd="sng" algn="ctr">
+                      <a:solidFill>
+                        <a:srgbClr val="2A2A3E"/>
+                      </a:solidFill>
+                      <a:prstDash val="solid"/>
+                      <a:round/>
+                      <a:headEnd type="none" w="med" len="med"/>
+                      <a:tailEnd type="none" w="med" len="med"/>
+                    </a:lnB>
+                    <a:solidFill>
+                      <a:srgbClr val="0A0A14"/>
+                    </a:solidFill>
+                  </a:tcPr>
+                </a:tc>
+                <a:tc>
+                  <a:txBody>
+                    <a:bodyPr/>
+                    <a:lstStyle/>
+                    <a:p>
+                      <a:pPr indent="0" marL="0">
+                        <a:buNone/>
+                      </a:pPr>
+                      <a:r>
+                        <a:rPr lang="en-US" sz="1200" dirty="0">
+                          <a:solidFill>
+                            <a:srgbClr val="FFFFFF"/>
+                          </a:solidFill>
+                          <a:latin typeface="Segoe UI" pitchFamily="34" charset="0"/>
+                          <a:ea typeface="Segoe UI" pitchFamily="34" charset="-122"/>
+                          <a:cs typeface="Segoe UI" pitchFamily="34" charset="-120"/>
+                        </a:rPr>
+                        <a:t>postgres-exporter + com.dynatrace.extension.otel-postgres Hub extension</a:t>
+                      </a:r>
+                      <a:endParaRPr lang="en-US" sz="1200" dirty="0">
+                        <a:latin typeface="Segoe UI" charset="0"/>
+                        <a:ea typeface="Segoe UI" charset="0"/>
+                        <a:cs typeface="Segoe UI" charset="0"/>
+                      </a:endParaRPr>
+                    </a:p>
+                  </a:txBody>
+                  <a:tcPr marL="91440" marR="91440" marT="45720" marB="45720" anchor="ctr">
+                    <a:lnL w="0" cap="flat" cmpd="sng" algn="ctr">
+                      <a:solidFill>
+                        <a:srgbClr val="0A0A14"/>
+                      </a:solidFill>
+                      <a:prstDash val="solid"/>
+                      <a:round/>
+                      <a:headEnd type="none" w="med" len="med"/>
+                      <a:tailEnd type="none" w="med" len="med"/>
+                    </a:lnL>
+                    <a:lnR w="0" cap="flat" cmpd="sng" algn="ctr">
+                      <a:solidFill>
+                        <a:srgbClr val="0A0A14"/>
+                      </a:solidFill>
+                      <a:prstDash val="solid"/>
+                      <a:round/>
+                      <a:headEnd type="none" w="med" len="med"/>
+                      <a:tailEnd type="none" w="med" len="med"/>
+                    </a:lnR>
+                    <a:lnT w="0" cap="flat" cmpd="sng" algn="ctr">
+                      <a:solidFill>
+                        <a:srgbClr val="0A0A14"/>
+                      </a:solidFill>
+                      <a:prstDash val="solid"/>
+                      <a:round/>
+                      <a:headEnd type="none" w="med" len="med"/>
+                      <a:tailEnd type="none" w="med" len="med"/>
+                    </a:lnT>
+                    <a:lnB w="6350" cap="flat" cmpd="sng" algn="ctr">
+                      <a:solidFill>
+                        <a:srgbClr val="2A2A3E"/>
+                      </a:solidFill>
+                      <a:prstDash val="solid"/>
+                      <a:round/>
+                      <a:headEnd type="none" w="med" len="med"/>
+                      <a:tailEnd type="none" w="med" len="med"/>
+                    </a:lnB>
+                    <a:solidFill>
+                      <a:srgbClr val="0A0A14"/>
+                    </a:solidFill>
+                  </a:tcPr>
+                </a:tc>
+                <a:tc>
+                  <a:txBody>
+                    <a:bodyPr/>
+                    <a:lstStyle/>
+                    <a:p>
+                      <a:pPr indent="0" marL="0">
+                        <a:buNone/>
+                      </a:pPr>
+                      <a:r>
+                        <a:rPr lang="en-US" sz="1200" dirty="0">
+                          <a:solidFill>
+                            <a:srgbClr val="FFFFFF"/>
+                          </a:solidFill>
+                          <a:latin typeface="Segoe UI" pitchFamily="34" charset="0"/>
+                          <a:ea typeface="Segoe UI" pitchFamily="34" charset="-122"/>
+                          <a:cs typeface="Segoe UI" pitchFamily="34" charset="-120"/>
+                        </a:rPr>
+                        <a:t>postgres.xact_commit, postgres.deadlocks, postgres.blks_hit</a:t>
+                      </a:r>
+                      <a:endParaRPr lang="en-US" sz="1200" dirty="0">
+                        <a:latin typeface="Segoe UI" charset="0"/>
+                        <a:ea typeface="Segoe UI" charset="0"/>
+                        <a:cs typeface="Segoe UI" charset="0"/>
+                      </a:endParaRPr>
+                    </a:p>
+                  </a:txBody>
+                  <a:tcPr marL="91440" marR="91440" marT="45720" marB="45720" anchor="ctr">
+                    <a:lnL w="0" cap="flat" cmpd="sng" algn="ctr">
+                      <a:solidFill>
+                        <a:srgbClr val="0A0A14"/>
+                      </a:solidFill>
+                      <a:prstDash val="solid"/>
+                      <a:round/>
+                      <a:headEnd type="none" w="med" len="med"/>
+                      <a:tailEnd type="none" w="med" len="med"/>
+                    </a:lnL>
+                    <a:lnR w="0" cap="flat" cmpd="sng" algn="ctr">
+                      <a:solidFill>
+                        <a:srgbClr val="0A0A14"/>
+                      </a:solidFill>
+                      <a:prstDash val="solid"/>
+                      <a:round/>
+                      <a:headEnd type="none" w="med" len="med"/>
+                      <a:tailEnd type="none" w="med" len="med"/>
+                    </a:lnR>
+                    <a:lnT w="0" cap="flat" cmpd="sng" algn="ctr">
+                      <a:solidFill>
+                        <a:srgbClr val="0A0A14"/>
+                      </a:solidFill>
+                      <a:prstDash val="solid"/>
+                      <a:round/>
+                      <a:headEnd type="none" w="med" len="med"/>
+                      <a:tailEnd type="none" w="med" len="med"/>
+                    </a:lnT>
+                    <a:lnB w="6350" cap="flat" cmpd="sng" algn="ctr">
+                      <a:solidFill>
+                        <a:srgbClr val="2A2A3E"/>
+                      </a:solidFill>
+                      <a:prstDash val="solid"/>
+                      <a:round/>
+                      <a:headEnd type="none" w="med" len="med"/>
+                      <a:tailEnd type="none" w="med" len="med"/>
+                    </a:lnB>
+                    <a:solidFill>
+                      <a:srgbClr val="0A0A14"/>
+                    </a:solidFill>
+                  </a:tcPr>
+                </a:tc>
+              </a:tr>
+              <a:tr h="786384">
+                <a:tc>
+                  <a:txBody>
+                    <a:bodyPr/>
+                    <a:lstStyle/>
+                    <a:p>
+                      <a:pPr indent="0" marL="0">
+                        <a:buNone/>
+                      </a:pPr>
+                      <a:r>
+                        <a:rPr lang="en-US" sz="1200" dirty="0">
+                          <a:solidFill>
+                            <a:srgbClr val="FFFFFF"/>
+                          </a:solidFill>
+                          <a:latin typeface="Segoe UI" pitchFamily="34" charset="0"/>
+                          <a:ea typeface="Segoe UI" pitchFamily="34" charset="-122"/>
+                          <a:cs typeface="Segoe UI" pitchFamily="34" charset="-120"/>
+                        </a:rPr>
+                        <a:t>Kafka</a:t>
+                      </a:r>
+                      <a:endParaRPr lang="en-US" sz="1200" dirty="0">
+                        <a:latin typeface="Segoe UI" charset="0"/>
+                        <a:ea typeface="Segoe UI" charset="0"/>
+                        <a:cs typeface="Segoe UI" charset="0"/>
+                      </a:endParaRPr>
+                    </a:p>
+                  </a:txBody>
+                  <a:tcPr marL="91440" marR="91440" marT="45720" marB="45720" anchor="ctr">
+                    <a:lnL w="0" cap="flat" cmpd="sng" algn="ctr">
+                      <a:solidFill>
+                        <a:srgbClr val="0A0A14"/>
+                      </a:solidFill>
+                      <a:prstDash val="solid"/>
+                      <a:round/>
+                      <a:headEnd type="none" w="med" len="med"/>
+                      <a:tailEnd type="none" w="med" len="med"/>
+                    </a:lnL>
+                    <a:lnR w="0" cap="flat" cmpd="sng" algn="ctr">
+                      <a:solidFill>
+                        <a:srgbClr val="0A0A14"/>
+                      </a:solidFill>
+                      <a:prstDash val="solid"/>
+                      <a:round/>
+                      <a:headEnd type="none" w="med" len="med"/>
+                      <a:tailEnd type="none" w="med" len="med"/>
+                    </a:lnR>
+                    <a:lnT w="0" cap="flat" cmpd="sng" algn="ctr">
+                      <a:solidFill>
+                        <a:srgbClr val="0A0A14"/>
+                      </a:solidFill>
+                      <a:prstDash val="solid"/>
+                      <a:round/>
+                      <a:headEnd type="none" w="med" len="med"/>
+                      <a:tailEnd type="none" w="med" len="med"/>
+                    </a:lnT>
+                    <a:lnB w="6350" cap="flat" cmpd="sng" algn="ctr">
+                      <a:solidFill>
+                        <a:srgbClr val="2A2A3E"/>
+                      </a:solidFill>
+                      <a:prstDash val="solid"/>
+                      <a:round/>
+                      <a:headEnd type="none" w="med" len="med"/>
+                      <a:tailEnd type="none" w="med" len="med"/>
+                    </a:lnB>
+                    <a:solidFill>
+                      <a:srgbClr val="0A0A14"/>
+                    </a:solidFill>
+                  </a:tcPr>
+                </a:tc>
+                <a:tc>
+                  <a:txBody>
+                    <a:bodyPr/>
+                    <a:lstStyle/>
+                    <a:p>
+                      <a:pPr indent="0" marL="0">
+                        <a:buNone/>
+                      </a:pPr>
+                      <a:r>
+                        <a:rPr lang="en-US" sz="1200" dirty="0">
+                          <a:solidFill>
+                            <a:srgbClr val="FFFFFF"/>
+                          </a:solidFill>
+                          <a:latin typeface="Segoe UI" pitchFamily="34" charset="0"/>
+                          <a:ea typeface="Segoe UI" pitchFamily="34" charset="-122"/>
+                          <a:cs typeface="Segoe UI" pitchFamily="34" charset="-120"/>
+                        </a:rPr>
+                        <a:t>OneAgent built-in Kafka sensor (auto-detects Apache Kafka JVM)</a:t>
+                      </a:r>
+                      <a:endParaRPr lang="en-US" sz="1200" dirty="0">
+                        <a:latin typeface="Segoe UI" charset="0"/>
+                        <a:ea typeface="Segoe UI" charset="0"/>
+                        <a:cs typeface="Segoe UI" charset="0"/>
+                      </a:endParaRPr>
+                    </a:p>
+                  </a:txBody>
+                  <a:tcPr marL="91440" marR="91440" marT="45720" marB="45720" anchor="ctr">
+                    <a:lnL w="0" cap="flat" cmpd="sng" algn="ctr">
+                      <a:solidFill>
+                        <a:srgbClr val="0A0A14"/>
+                      </a:solidFill>
+                      <a:prstDash val="solid"/>
+                      <a:round/>
+                      <a:headEnd type="none" w="med" len="med"/>
+                      <a:tailEnd type="none" w="med" len="med"/>
+                    </a:lnL>
+                    <a:lnR w="0" cap="flat" cmpd="sng" algn="ctr">
+                      <a:solidFill>
+                        <a:srgbClr val="0A0A14"/>
+                      </a:solidFill>
+                      <a:prstDash val="solid"/>
+                      <a:round/>
+                      <a:headEnd type="none" w="med" len="med"/>
+                      <a:tailEnd type="none" w="med" len="med"/>
+                    </a:lnR>
+                    <a:lnT w="0" cap="flat" cmpd="sng" algn="ctr">
+                      <a:solidFill>
+                        <a:srgbClr val="0A0A14"/>
+                      </a:solidFill>
+                      <a:prstDash val="solid"/>
+                      <a:round/>
+                      <a:headEnd type="none" w="med" len="med"/>
+                      <a:tailEnd type="none" w="med" len="med"/>
+                    </a:lnT>
+                    <a:lnB w="6350" cap="flat" cmpd="sng" algn="ctr">
+                      <a:solidFill>
+                        <a:srgbClr val="2A2A3E"/>
+                      </a:solidFill>
+                      <a:prstDash val="solid"/>
+                      <a:round/>
+                      <a:headEnd type="none" w="med" len="med"/>
+                      <a:tailEnd type="none" w="med" len="med"/>
+                    </a:lnB>
+                    <a:solidFill>
+                      <a:srgbClr val="0A0A14"/>
+                    </a:solidFill>
+                  </a:tcPr>
+                </a:tc>
+                <a:tc>
+                  <a:txBody>
+                    <a:bodyPr/>
+                    <a:lstStyle/>
+                    <a:p>
+                      <a:pPr indent="0" marL="0">
+                        <a:buNone/>
+                      </a:pPr>
+                      <a:r>
+                        <a:rPr lang="en-US" sz="1200" dirty="0">
+                          <a:solidFill>
+                            <a:srgbClr val="FFFFFF"/>
+                          </a:solidFill>
+                          <a:latin typeface="Segoe UI" pitchFamily="34" charset="0"/>
+                          <a:ea typeface="Segoe UI" pitchFamily="34" charset="-122"/>
+                          <a:cs typeface="Segoe UI" pitchFamily="34" charset="-120"/>
+                        </a:rPr>
+                        <a:t>kafka.consumer_group.lag, kafka.request.time.99p, kafka.purgatory.size</a:t>
+                      </a:r>
+                      <a:endParaRPr lang="en-US" sz="1200" dirty="0">
+                        <a:latin typeface="Segoe UI" charset="0"/>
+                        <a:ea typeface="Segoe UI" charset="0"/>
+                        <a:cs typeface="Segoe UI" charset="0"/>
+                      </a:endParaRPr>
+                    </a:p>
+                  </a:txBody>
+                  <a:tcPr marL="91440" marR="91440" marT="45720" marB="45720" anchor="ctr">
+                    <a:lnL w="0" cap="flat" cmpd="sng" algn="ctr">
+                      <a:solidFill>
+                        <a:srgbClr val="0A0A14"/>
+                      </a:solidFill>
+                      <a:prstDash val="solid"/>
+                      <a:round/>
+                      <a:headEnd type="none" w="med" len="med"/>
+                      <a:tailEnd type="none" w="med" len="med"/>
+                    </a:lnL>
+                    <a:lnR w="0" cap="flat" cmpd="sng" algn="ctr">
+                      <a:solidFill>
+                        <a:srgbClr val="0A0A14"/>
+                      </a:solidFill>
+                      <a:prstDash val="solid"/>
+                      <a:round/>
+                      <a:headEnd type="none" w="med" len="med"/>
+                      <a:tailEnd type="none" w="med" len="med"/>
+                    </a:lnR>
+                    <a:lnT w="0" cap="flat" cmpd="sng" algn="ctr">
+                      <a:solidFill>
+                        <a:srgbClr val="0A0A14"/>
+                      </a:solidFill>
+                      <a:prstDash val="solid"/>
+                      <a:round/>
+                      <a:headEnd type="none" w="med" len="med"/>
+                      <a:tailEnd type="none" w="med" len="med"/>
+                    </a:lnT>
+                    <a:lnB w="6350" cap="flat" cmpd="sng" algn="ctr">
+                      <a:solidFill>
+                        <a:srgbClr val="2A2A3E"/>
+                      </a:solidFill>
+                      <a:prstDash val="solid"/>
+                      <a:round/>
+                      <a:headEnd type="none" w="med" len="med"/>
+                      <a:tailEnd type="none" w="med" len="med"/>
+                    </a:lnB>
+                    <a:solidFill>
+                      <a:srgbClr val="0A0A14"/>
+                    </a:solidFill>
+                  </a:tcPr>
+                </a:tc>
+              </a:tr>
+            </a:tbl>
+          </a:graphicData>
+        </a:graphic>
+      </p:graphicFrame>
     </p:spTree>
   </p:cSld>
   <p:clrMapOvr>
@@ -7053,7 +7618,7 @@
                 <a:ea typeface="Segoe UI" pitchFamily="34" charset="-122"/>
                 <a:cs typeface="Segoe UI" pitchFamily="34" charset="-120"/>
               </a:rPr>
-              <a:t>Metric-first DQL</a:t>
+              <a:t>`endpoint.name` and the `GET /*` reality</a:t>
             </a:r>
             <a:endParaRPr lang="en-US" sz="3600" dirty="0"/>
           </a:p>
@@ -7118,160 +7683,100 @@
         <p:spPr>
           <a:xfrm>
             <a:off x="457200" y="1463040"/>
-            <a:ext cx="8229600" cy="2240280"/>
+            <a:ext cx="8229600" cy="1691640"/>
           </a:xfrm>
           <a:prstGeom prst="rect">
             <a:avLst/>
           </a:prstGeom>
-          <a:solidFill>
-            <a:srgbClr val="1A1A2E"/>
-          </a:solidFill>
+          <a:noFill/>
           <a:ln/>
         </p:spPr>
         <p:txBody>
-          <a:bodyPr wrap="square" rtlCol="0" anchor="t"/>
+          <a:bodyPr wrap="square" lIns="0" tIns="0" rIns="0" bIns="0" rtlCol="0" anchor="t"/>
           <a:lstStyle/>
           <a:p>
-            <a:pPr indent="0" marL="0">
-              <a:buNone/>
-            </a:pPr>
-            <a:r>
-              <a:rPr lang="en-US" sz="1100" dirty="0">
+            <a:pPr marL="342900" indent="-342900">
+              <a:lnSpc>
+                <a:spcPct val="120000"/>
+              </a:lnSpc>
+              <a:buSzPct val="100000"/>
+              <a:buChar char="•"/>
+            </a:pPr>
+            <a:r>
+              <a:rPr lang="en-US" sz="2000" dirty="0">
                 <a:solidFill>
                   <a:srgbClr val="FFFFFF"/>
                 </a:solidFill>
-                <a:latin typeface="Consolas" pitchFamily="34" charset="0"/>
-                <a:ea typeface="Consolas" pitchFamily="34" charset="-122"/>
-                <a:cs typeface="Consolas" pitchFamily="34" charset="-120"/>
-              </a:rPr>
-              <a:t>// Classic shape</a:t>
-            </a:r>
-            <a:endParaRPr lang="en-US" sz="1100" dirty="0"/>
-          </a:p>
-          <a:p>
-            <a:pPr indent="0" marL="0">
-              <a:buNone/>
-            </a:pPr>
-            <a:r>
-              <a:rPr lang="en-US" sz="1100" dirty="0">
+                <a:latin typeface="Segoe UI" pitchFamily="34" charset="0"/>
+                <a:ea typeface="Segoe UI" pitchFamily="34" charset="-122"/>
+                <a:cs typeface="Segoe UI" pitchFamily="34" charset="-120"/>
+              </a:rPr>
+              <a:t>endpoint.name derives from http.route on server spans</a:t>
+            </a:r>
+            <a:endParaRPr lang="en-US" sz="2000" dirty="0"/>
+          </a:p>
+          <a:p>
+            <a:pPr marL="342900" indent="-342900">
+              <a:lnSpc>
+                <a:spcPct val="120000"/>
+              </a:lnSpc>
+              <a:buSzPct val="100000"/>
+              <a:buChar char="•"/>
+            </a:pPr>
+            <a:r>
+              <a:rPr lang="en-US" sz="2000" dirty="0">
                 <a:solidFill>
                   <a:srgbClr val="FFFFFF"/>
                 </a:solidFill>
-                <a:latin typeface="Consolas" pitchFamily="34" charset="0"/>
-                <a:ea typeface="Consolas" pitchFamily="34" charset="-122"/>
-                <a:cs typeface="Consolas" pitchFamily="34" charset="-120"/>
-              </a:rPr>
-              <a:t>fetch dt.entity.service</a:t>
-            </a:r>
-            <a:endParaRPr lang="en-US" sz="1100" dirty="0"/>
-          </a:p>
-          <a:p>
-            <a:pPr indent="0" marL="0">
-              <a:buNone/>
-            </a:pPr>
-            <a:r>
-              <a:rPr lang="en-US" sz="1100" dirty="0">
+                <a:latin typeface="Segoe UI" pitchFamily="34" charset="0"/>
+                <a:ea typeface="Segoe UI" pitchFamily="34" charset="-122"/>
+                <a:cs typeface="Segoe UI" pitchFamily="34" charset="-120"/>
+              </a:rPr>
+              <a:t>If http.route isn't set → fallback to &lt;METHOD&gt; /*</a:t>
+            </a:r>
+            <a:endParaRPr lang="en-US" sz="2000" dirty="0"/>
+          </a:p>
+          <a:p>
+            <a:pPr marL="342900" indent="-342900">
+              <a:lnSpc>
+                <a:spcPct val="120000"/>
+              </a:lnSpc>
+              <a:buSzPct val="100000"/>
+              <a:buChar char="•"/>
+            </a:pPr>
+            <a:r>
+              <a:rPr lang="en-US" sz="2000" dirty="0">
                 <a:solidFill>
                   <a:srgbClr val="FFFFFF"/>
                 </a:solidFill>
-                <a:latin typeface="Consolas" pitchFamily="34" charset="0"/>
-                <a:ea typeface="Consolas" pitchFamily="34" charset="-122"/>
-                <a:cs typeface="Consolas" pitchFamily="34" charset="-120"/>
-              </a:rPr>
-              <a:t>| filter entity.name == "orders-sdv2 -- orders-demo"</a:t>
-            </a:r>
-            <a:endParaRPr lang="en-US" sz="1100" dirty="0"/>
-          </a:p>
-          <a:p>
-            <a:pPr indent="0" marL="0">
-              <a:buNone/>
-            </a:pPr>
-            <a:r>
-              <a:rPr lang="en-US" sz="1100" dirty="0">
+                <a:latin typeface="Segoe UI" pitchFamily="34" charset="0"/>
+                <a:ea typeface="Segoe UI" pitchFamily="34" charset="-122"/>
+                <a:cs typeface="Segoe UI" pitchFamily="34" charset="-120"/>
+              </a:rPr>
+              <a:t>Spring MVC + OneAgent + orders-demo today → every endpoint is GET /*</a:t>
+            </a:r>
+            <a:endParaRPr lang="en-US" sz="2000" dirty="0"/>
+          </a:p>
+          <a:p>
+            <a:pPr marL="342900" indent="-342900">
+              <a:lnSpc>
+                <a:spcPct val="120000"/>
+              </a:lnSpc>
+              <a:buSzPct val="100000"/>
+              <a:buChar char="•"/>
+            </a:pPr>
+            <a:r>
+              <a:rPr lang="en-US" sz="2000" dirty="0">
                 <a:solidFill>
                   <a:srgbClr val="FFFFFF"/>
                 </a:solidFill>
-                <a:latin typeface="Consolas" pitchFamily="34" charset="0"/>
-                <a:ea typeface="Consolas" pitchFamily="34" charset="-122"/>
-                <a:cs typeface="Consolas" pitchFamily="34" charset="-120"/>
-              </a:rPr>
-              <a:t>| lookup [timeseries count = sum(dt.service.request.count), by: {dt.entity.service}],</a:t>
-            </a:r>
-            <a:endParaRPr lang="en-US" sz="1100" dirty="0"/>
-          </a:p>
-          <a:p>
-            <a:pPr indent="0" marL="0">
-              <a:buNone/>
-            </a:pPr>
-            <a:r>
-              <a:rPr lang="en-US" sz="1100" dirty="0">
-                <a:solidFill>
-                  <a:srgbClr val="FFFFFF"/>
-                </a:solidFill>
-                <a:latin typeface="Consolas" pitchFamily="34" charset="0"/>
-                <a:ea typeface="Consolas" pitchFamily="34" charset="-122"/>
-                <a:cs typeface="Consolas" pitchFamily="34" charset="-120"/>
-              </a:rPr>
-              <a:t>    sourceField: id, lookupField: dt.entity.service</a:t>
-            </a:r>
-            <a:endParaRPr lang="en-US" sz="1100" dirty="0"/>
-          </a:p>
-          <a:p>
-            <a:pPr indent="0" marL="0">
-              <a:buNone/>
-            </a:pPr>
-            <a:endParaRPr lang="en-US" sz="1100" dirty="0"/>
-          </a:p>
-          <a:p>
-            <a:pPr indent="0" marL="0">
-              <a:buNone/>
-            </a:pPr>
-            <a:r>
-              <a:rPr lang="en-US" sz="1100" dirty="0">
-                <a:solidFill>
-                  <a:srgbClr val="FFFFFF"/>
-                </a:solidFill>
-                <a:latin typeface="Consolas" pitchFamily="34" charset="0"/>
-                <a:ea typeface="Consolas" pitchFamily="34" charset="-122"/>
-                <a:cs typeface="Consolas" pitchFamily="34" charset="-120"/>
-              </a:rPr>
-              <a:t>// Latest shape</a:t>
-            </a:r>
-            <a:endParaRPr lang="en-US" sz="1100" dirty="0"/>
-          </a:p>
-          <a:p>
-            <a:pPr indent="0" marL="0">
-              <a:buNone/>
-            </a:pPr>
-            <a:r>
-              <a:rPr lang="en-US" sz="1100" dirty="0">
-                <a:solidFill>
-                  <a:srgbClr val="FFFFFF"/>
-                </a:solidFill>
-                <a:latin typeface="Consolas" pitchFamily="34" charset="0"/>
-                <a:ea typeface="Consolas" pitchFamily="34" charset="-122"/>
-                <a:cs typeface="Consolas" pitchFamily="34" charset="-120"/>
-              </a:rPr>
-              <a:t>timeseries count = sum(dt.service.request.count),</a:t>
-            </a:r>
-            <a:endParaRPr lang="en-US" sz="1100" dirty="0"/>
-          </a:p>
-          <a:p>
-            <a:pPr indent="0" marL="0">
-              <a:buNone/>
-            </a:pPr>
-            <a:r>
-              <a:rPr lang="en-US" sz="1100" dirty="0">
-                <a:solidFill>
-                  <a:srgbClr val="FFFFFF"/>
-                </a:solidFill>
-                <a:latin typeface="Consolas" pitchFamily="34" charset="0"/>
-                <a:ea typeface="Consolas" pitchFamily="34" charset="-122"/>
-                <a:cs typeface="Consolas" pitchFamily="34" charset="-120"/>
-              </a:rPr>
-              <a:t>  filter: dt.service.name == "orders-sdv2 -- orders-demo"</a:t>
-            </a:r>
-            <a:endParaRPr lang="en-US" sz="1100" dirty="0"/>
+                <a:latin typeface="Segoe UI" pitchFamily="34" charset="0"/>
+                <a:ea typeface="Segoe UI" pitchFamily="34" charset="-122"/>
+                <a:cs typeface="Segoe UI" pitchFamily="34" charset="-120"/>
+              </a:rPr>
+              <a:t>Throughput and latency are still right. The labels are wrong.</a:t>
+            </a:r>
+            <a:endParaRPr lang="en-US" sz="2000" dirty="0"/>
           </a:p>
         </p:txBody>
       </p:sp>
@@ -7283,7 +7788,7 @@
         </p:nvSpPr>
         <p:spPr>
           <a:xfrm>
-            <a:off x="457200" y="3840480"/>
+            <a:off x="457200" y="3291840"/>
             <a:ext cx="8229600" cy="832104"/>
           </a:xfrm>
           <a:prstGeom prst="rect">
@@ -7300,15 +7805,110 @@
               <a:buNone/>
             </a:pPr>
             <a:r>
-              <a:rPr lang="en-US" sz="2000" dirty="0">
-                <a:solidFill>
-                  <a:srgbClr val="FFFFFF"/>
+              <a:rPr lang="en-US" sz="2000" b="1" dirty="0">
+                <a:solidFill>
+                  <a:srgbClr val="00A1E0"/>
                 </a:solidFill>
                 <a:latin typeface="Segoe UI" pitchFamily="34" charset="0"/>
                 <a:ea typeface="Segoe UI" pitchFamily="34" charset="-122"/>
                 <a:cs typeface="Segoe UI" pitchFamily="34" charset="-120"/>
               </a:rPr>
-              <a:t>Same answer. Fewer lines, fewer scanned records, stable across entity re-detection.</a:t>
+              <a:t>Fix today:</a:t>
+            </a:r>
+            <a:pPr indent="0" marL="0">
+              <a:buNone/>
+            </a:pPr>
+            <a:r>
+              <a:rPr lang="en-US" sz="2000" dirty="0">
+                <a:solidFill>
+                  <a:srgbClr val="FFFFFF"/>
+                </a:solidFill>
+                <a:latin typeface="Segoe UI" pitchFamily="34" charset="0"/>
+                <a:ea typeface="Segoe UI" pitchFamily="34" charset="-122"/>
+                <a:cs typeface="Segoe UI" pitchFamily="34" charset="-120"/>
+              </a:rPr>
+              <a:t> Settings → Service detection → URL path pattern matching (SDv1 and SDv2).</a:t>
+            </a:r>
+            <a:endParaRPr lang="en-US" sz="2000" dirty="0"/>
+          </a:p>
+        </p:txBody>
+      </p:sp>
+      <p:sp>
+        <p:nvSpPr>
+          <p:cNvPr id="7" name="Text 5"/>
+          <p:cNvSpPr/>
+          <p:nvPr/>
+        </p:nvSpPr>
+        <p:spPr>
+          <a:xfrm>
+            <a:off x="457200" y="4306824"/>
+            <a:ext cx="8229600" cy="448056"/>
+          </a:xfrm>
+          <a:prstGeom prst="rect">
+            <a:avLst/>
+          </a:prstGeom>
+          <a:noFill/>
+          <a:ln/>
+        </p:spPr>
+        <p:txBody>
+          <a:bodyPr wrap="square" lIns="0" tIns="0" rIns="0" bIns="0" rtlCol="0" anchor="t"/>
+          <a:lstStyle/>
+          <a:p>
+            <a:pPr indent="0" marL="0">
+              <a:buNone/>
+            </a:pPr>
+            <a:r>
+              <a:rPr lang="en-US" sz="2000" b="1" dirty="0">
+                <a:solidFill>
+                  <a:srgbClr val="00A1E0"/>
+                </a:solidFill>
+                <a:latin typeface="Segoe UI" pitchFamily="34" charset="0"/>
+                <a:ea typeface="Segoe UI" pitchFamily="34" charset="-122"/>
+                <a:cs typeface="Segoe UI" pitchFamily="34" charset="-120"/>
+              </a:rPr>
+              <a:t>Automatic URL normalization coming.</a:t>
+            </a:r>
+            <a:pPr indent="0" marL="0">
+              <a:buNone/>
+            </a:pPr>
+            <a:r>
+              <a:rPr lang="en-US" sz="2000" dirty="0">
+                <a:solidFill>
+                  <a:srgbClr val="FFFFFF"/>
+                </a:solidFill>
+                <a:latin typeface="Segoe UI" pitchFamily="34" charset="0"/>
+                <a:ea typeface="Segoe UI" pitchFamily="34" charset="-122"/>
+                <a:cs typeface="Segoe UI" pitchFamily="34" charset="-120"/>
+              </a:rPr>
+              <a:t> Derives </a:t>
+            </a:r>
+            <a:pPr indent="0" marL="0">
+              <a:buNone/>
+            </a:pPr>
+            <a:r>
+              <a:rPr lang="en-US" sz="1800" dirty="0">
+                <a:solidFill>
+                  <a:srgbClr val="FFFFFF"/>
+                </a:solidFill>
+                <a:latin typeface="Consolas" pitchFamily="34" charset="0"/>
+                <a:ea typeface="Consolas" pitchFamily="34" charset="-122"/>
+                <a:cs typeface="Consolas" pitchFamily="34" charset="-120"/>
+              </a:rPr>
+              <a:t>http.route</a:t>
+            </a:r>
+            <a:pPr indent="0" marL="0">
+              <a:buNone/>
+            </a:pPr>
+            <a:r>
+              <a:rPr lang="en-US" sz="2000" dirty="0">
+                <a:solidFill>
+                  <a:srgbClr val="FFFFFF"/>
+                </a:solidFill>
+                <a:latin typeface="Segoe UI" pitchFamily="34" charset="0"/>
+                <a:ea typeface="Segoe UI" pitchFamily="34" charset="-122"/>
+                <a:cs typeface="Segoe UI" pitchFamily="34" charset="-120"/>
+              </a:rPr>
+              <a:t> by truncating at the first volatile segment (IDs, hashes, UUIDs). Classic-first rollout; SDv2 opt-in then default.</a:t>
             </a:r>
             <a:endParaRPr lang="en-US" sz="2000" dirty="0"/>
           </a:p>
@@ -7372,7 +7972,7 @@
                 <a:ea typeface="Segoe UI" pitchFamily="34" charset="-122"/>
                 <a:cs typeface="Segoe UI" pitchFamily="34" charset="-120"/>
               </a:rPr>
-              <a:t>What's coming</a:t>
+              <a:t>Metric-first DQL</a:t>
             </a:r>
             <a:endParaRPr lang="en-US" sz="3600" dirty="0"/>
           </a:p>
@@ -7437,7 +8037,173 @@
         <p:spPr>
           <a:xfrm>
             <a:off x="457200" y="1463040"/>
-            <a:ext cx="8229600" cy="3291840"/>
+            <a:ext cx="8229600" cy="2240280"/>
+          </a:xfrm>
+          <a:prstGeom prst="rect">
+            <a:avLst/>
+          </a:prstGeom>
+          <a:solidFill>
+            <a:srgbClr val="1A1A2E"/>
+          </a:solidFill>
+          <a:ln/>
+        </p:spPr>
+        <p:txBody>
+          <a:bodyPr wrap="square" rtlCol="0" anchor="t"/>
+          <a:lstStyle/>
+          <a:p>
+            <a:pPr indent="0" marL="0">
+              <a:buNone/>
+            </a:pPr>
+            <a:r>
+              <a:rPr lang="en-US" sz="1100" dirty="0">
+                <a:solidFill>
+                  <a:srgbClr val="FFFFFF"/>
+                </a:solidFill>
+                <a:latin typeface="Consolas" pitchFamily="34" charset="0"/>
+                <a:ea typeface="Consolas" pitchFamily="34" charset="-122"/>
+                <a:cs typeface="Consolas" pitchFamily="34" charset="-120"/>
+              </a:rPr>
+              <a:t>// Classic shape</a:t>
+            </a:r>
+            <a:endParaRPr lang="en-US" sz="1100" dirty="0"/>
+          </a:p>
+          <a:p>
+            <a:pPr indent="0" marL="0">
+              <a:buNone/>
+            </a:pPr>
+            <a:r>
+              <a:rPr lang="en-US" sz="1100" dirty="0">
+                <a:solidFill>
+                  <a:srgbClr val="FFFFFF"/>
+                </a:solidFill>
+                <a:latin typeface="Consolas" pitchFamily="34" charset="0"/>
+                <a:ea typeface="Consolas" pitchFamily="34" charset="-122"/>
+                <a:cs typeface="Consolas" pitchFamily="34" charset="-120"/>
+              </a:rPr>
+              <a:t>fetch dt.entity.service</a:t>
+            </a:r>
+            <a:endParaRPr lang="en-US" sz="1100" dirty="0"/>
+          </a:p>
+          <a:p>
+            <a:pPr indent="0" marL="0">
+              <a:buNone/>
+            </a:pPr>
+            <a:r>
+              <a:rPr lang="en-US" sz="1100" dirty="0">
+                <a:solidFill>
+                  <a:srgbClr val="FFFFFF"/>
+                </a:solidFill>
+                <a:latin typeface="Consolas" pitchFamily="34" charset="0"/>
+                <a:ea typeface="Consolas" pitchFamily="34" charset="-122"/>
+                <a:cs typeface="Consolas" pitchFamily="34" charset="-120"/>
+              </a:rPr>
+              <a:t>| filter entity.name == "orders-sdv2 -- orders-demo"</a:t>
+            </a:r>
+            <a:endParaRPr lang="en-US" sz="1100" dirty="0"/>
+          </a:p>
+          <a:p>
+            <a:pPr indent="0" marL="0">
+              <a:buNone/>
+            </a:pPr>
+            <a:r>
+              <a:rPr lang="en-US" sz="1100" dirty="0">
+                <a:solidFill>
+                  <a:srgbClr val="FFFFFF"/>
+                </a:solidFill>
+                <a:latin typeface="Consolas" pitchFamily="34" charset="0"/>
+                <a:ea typeface="Consolas" pitchFamily="34" charset="-122"/>
+                <a:cs typeface="Consolas" pitchFamily="34" charset="-120"/>
+              </a:rPr>
+              <a:t>| lookup [timeseries count = sum(dt.service.request.count), by: {dt.entity.service}],</a:t>
+            </a:r>
+            <a:endParaRPr lang="en-US" sz="1100" dirty="0"/>
+          </a:p>
+          <a:p>
+            <a:pPr indent="0" marL="0">
+              <a:buNone/>
+            </a:pPr>
+            <a:r>
+              <a:rPr lang="en-US" sz="1100" dirty="0">
+                <a:solidFill>
+                  <a:srgbClr val="FFFFFF"/>
+                </a:solidFill>
+                <a:latin typeface="Consolas" pitchFamily="34" charset="0"/>
+                <a:ea typeface="Consolas" pitchFamily="34" charset="-122"/>
+                <a:cs typeface="Consolas" pitchFamily="34" charset="-120"/>
+              </a:rPr>
+              <a:t>    sourceField: id, lookupField: dt.entity.service</a:t>
+            </a:r>
+            <a:endParaRPr lang="en-US" sz="1100" dirty="0"/>
+          </a:p>
+          <a:p>
+            <a:pPr indent="0" marL="0">
+              <a:buNone/>
+            </a:pPr>
+            <a:endParaRPr lang="en-US" sz="1100" dirty="0"/>
+          </a:p>
+          <a:p>
+            <a:pPr indent="0" marL="0">
+              <a:buNone/>
+            </a:pPr>
+            <a:r>
+              <a:rPr lang="en-US" sz="1100" dirty="0">
+                <a:solidFill>
+                  <a:srgbClr val="FFFFFF"/>
+                </a:solidFill>
+                <a:latin typeface="Consolas" pitchFamily="34" charset="0"/>
+                <a:ea typeface="Consolas" pitchFamily="34" charset="-122"/>
+                <a:cs typeface="Consolas" pitchFamily="34" charset="-120"/>
+              </a:rPr>
+              <a:t>// Latest shape</a:t>
+            </a:r>
+            <a:endParaRPr lang="en-US" sz="1100" dirty="0"/>
+          </a:p>
+          <a:p>
+            <a:pPr indent="0" marL="0">
+              <a:buNone/>
+            </a:pPr>
+            <a:r>
+              <a:rPr lang="en-US" sz="1100" dirty="0">
+                <a:solidFill>
+                  <a:srgbClr val="FFFFFF"/>
+                </a:solidFill>
+                <a:latin typeface="Consolas" pitchFamily="34" charset="0"/>
+                <a:ea typeface="Consolas" pitchFamily="34" charset="-122"/>
+                <a:cs typeface="Consolas" pitchFamily="34" charset="-120"/>
+              </a:rPr>
+              <a:t>timeseries count = sum(dt.service.request.count),</a:t>
+            </a:r>
+            <a:endParaRPr lang="en-US" sz="1100" dirty="0"/>
+          </a:p>
+          <a:p>
+            <a:pPr indent="0" marL="0">
+              <a:buNone/>
+            </a:pPr>
+            <a:r>
+              <a:rPr lang="en-US" sz="1100" dirty="0">
+                <a:solidFill>
+                  <a:srgbClr val="FFFFFF"/>
+                </a:solidFill>
+                <a:latin typeface="Consolas" pitchFamily="34" charset="0"/>
+                <a:ea typeface="Consolas" pitchFamily="34" charset="-122"/>
+                <a:cs typeface="Consolas" pitchFamily="34" charset="-120"/>
+              </a:rPr>
+              <a:t>  filter: dt.service.name == "orders-sdv2 -- orders-demo"</a:t>
+            </a:r>
+            <a:endParaRPr lang="en-US" sz="1100" dirty="0"/>
+          </a:p>
+        </p:txBody>
+      </p:sp>
+      <p:sp>
+        <p:nvSpPr>
+          <p:cNvPr id="6" name="Text 4"/>
+          <p:cNvSpPr/>
+          <p:nvPr/>
+        </p:nvSpPr>
+        <p:spPr>
+          <a:xfrm>
+            <a:off x="457200" y="3840480"/>
+            <a:ext cx="8229600" cy="832104"/>
           </a:xfrm>
           <a:prstGeom prst="rect">
             <a:avLst/>
@@ -7449,12 +8215,8 @@
           <a:bodyPr wrap="square" lIns="0" tIns="0" rIns="0" bIns="0" rtlCol="0" anchor="t"/>
           <a:lstStyle/>
           <a:p>
-            <a:pPr marL="342900" indent="-342900">
-              <a:lnSpc>
-                <a:spcPct val="120000"/>
-              </a:lnSpc>
-              <a:buSzPct val="100000"/>
-              <a:buChar char="•"/>
+            <a:pPr indent="0" marL="0">
+              <a:buNone/>
             </a:pPr>
             <a:r>
               <a:rPr lang="en-US" sz="2000" dirty="0">
@@ -7465,133 +8227,7 @@
                 <a:ea typeface="Segoe UI" pitchFamily="34" charset="-122"/>
                 <a:cs typeface="Segoe UI" pitchFamily="34" charset="-120"/>
               </a:rPr>
-              <a:t>Automatic URL normalization — closes the GET /* gap</a:t>
-            </a:r>
-            <a:endParaRPr lang="en-US" sz="2000" dirty="0"/>
-          </a:p>
-          <a:p>
-            <a:pPr marL="342900" indent="-342900">
-              <a:lnSpc>
-                <a:spcPct val="120000"/>
-              </a:lnSpc>
-              <a:buSzPct val="100000"/>
-              <a:buChar char="•"/>
-            </a:pPr>
-            <a:r>
-              <a:rPr lang="en-US" sz="2000" dirty="0">
-                <a:solidFill>
-                  <a:srgbClr val="FFFFFF"/>
-                </a:solidFill>
-                <a:latin typeface="Segoe UI" pitchFamily="34" charset="0"/>
-                <a:ea typeface="Segoe UI" pitchFamily="34" charset="-122"/>
-                <a:cs typeface="Segoe UI" pitchFamily="34" charset="-120"/>
-              </a:rPr>
-              <a:t>Pipeline-side naming in OpenPipeline — admin writes a rule, dt.service.name set on every span centrally</a:t>
-            </a:r>
-            <a:endParaRPr lang="en-US" sz="2000" dirty="0"/>
-          </a:p>
-          <a:p>
-            <a:pPr marL="342900" indent="-342900">
-              <a:lnSpc>
-                <a:spcPct val="120000"/>
-              </a:lnSpc>
-              <a:buSzPct val="100000"/>
-              <a:buChar char="•"/>
-            </a:pPr>
-            <a:r>
-              <a:rPr lang="en-US" sz="2000" dirty="0">
-                <a:solidFill>
-                  <a:srgbClr val="FFFFFF"/>
-                </a:solidFill>
-                <a:latin typeface="Segoe UI" pitchFamily="34" charset="0"/>
-                <a:ea typeface="Segoe UI" pitchFamily="34" charset="-122"/>
-                <a:cs typeface="Segoe UI" pitchFamily="34" charset="-120"/>
-              </a:rPr>
-              <a:t>SERVICE_DEPLOYMENT — per-env entity orthogonal to SERVICE; staging vs prod without splitting identity (maps to Datadog's service+env+version)</a:t>
-            </a:r>
-            <a:endParaRPr lang="en-US" sz="2000" dirty="0"/>
-          </a:p>
-          <a:p>
-            <a:pPr marL="342900" indent="-342900">
-              <a:lnSpc>
-                <a:spcPct val="120000"/>
-              </a:lnSpc>
-              <a:buSzPct val="100000"/>
-              <a:buChar char="•"/>
-            </a:pPr>
-            <a:r>
-              <a:rPr lang="en-US" sz="2000" dirty="0">
-                <a:solidFill>
-                  <a:srgbClr val="FFFFFF"/>
-                </a:solidFill>
-                <a:latin typeface="Segoe UI" pitchFamily="34" charset="0"/>
-                <a:ea typeface="Segoe UI" pitchFamily="34" charset="-122"/>
-                <a:cs typeface="Segoe UI" pitchFamily="34" charset="-120"/>
-              </a:rPr>
-              <a:t>Primary Fields as metric dimensions — k8s.cluster.name, tags become first-class on service metrics</a:t>
-            </a:r>
-            <a:endParaRPr lang="en-US" sz="2000" dirty="0"/>
-          </a:p>
-          <a:p>
-            <a:pPr marL="342900" indent="-342900">
-              <a:lnSpc>
-                <a:spcPct val="120000"/>
-              </a:lnSpc>
-              <a:buSzPct val="100000"/>
-              <a:buChar char="•"/>
-            </a:pPr>
-            <a:r>
-              <a:rPr lang="en-US" sz="2000" dirty="0">
-                <a:solidFill>
-                  <a:srgbClr val="FFFFFF"/>
-                </a:solidFill>
-                <a:latin typeface="Segoe UI" pitchFamily="34" charset="0"/>
-                <a:ea typeface="Segoe UI" pitchFamily="34" charset="-122"/>
-                <a:cs typeface="Segoe UI" pitchFamily="34" charset="-120"/>
-              </a:rPr>
-              <a:t>Services app rewire to timeseries-first — list + detail pages go query-led</a:t>
-            </a:r>
-            <a:endParaRPr lang="en-US" sz="2000" dirty="0"/>
-          </a:p>
-          <a:p>
-            <a:pPr marL="342900" indent="-342900">
-              <a:lnSpc>
-                <a:spcPct val="120000"/>
-              </a:lnSpc>
-              <a:buSzPct val="100000"/>
-              <a:buChar char="•"/>
-            </a:pPr>
-            <a:r>
-              <a:rPr lang="en-US" sz="2000" dirty="0">
-                <a:solidFill>
-                  <a:srgbClr val="FFFFFF"/>
-                </a:solidFill>
-                <a:latin typeface="Segoe UI" pitchFamily="34" charset="0"/>
-                <a:ea typeface="Segoe UI" pitchFamily="34" charset="-122"/>
-                <a:cs typeface="Segoe UI" pitchFamily="34" charset="-120"/>
-              </a:rPr>
-              <a:t>dt.service.database.* linked to real DB entities — future SDv2-for-OneAgent release; span data is already shaped correctly</a:t>
-            </a:r>
-            <a:endParaRPr lang="en-US" sz="2000" dirty="0"/>
-          </a:p>
-          <a:p>
-            <a:pPr marL="342900" indent="-342900">
-              <a:lnSpc>
-                <a:spcPct val="120000"/>
-              </a:lnSpc>
-              <a:buSzPct val="100000"/>
-              <a:buChar char="•"/>
-            </a:pPr>
-            <a:r>
-              <a:rPr lang="en-US" sz="2000" dirty="0">
-                <a:solidFill>
-                  <a:srgbClr val="FFFFFF"/>
-                </a:solidFill>
-                <a:latin typeface="Segoe UI" pitchFamily="34" charset="0"/>
-                <a:ea typeface="Segoe UI" pitchFamily="34" charset="-122"/>
-                <a:cs typeface="Segoe UI" pitchFamily="34" charset="-120"/>
-              </a:rPr>
-              <a:t>Messaging → broker entity — same idea, further out</a:t>
+              <a:t>Same answer. Fewer lines, fewer scanned records, stable across entity re-detection.</a:t>
             </a:r>
             <a:endParaRPr lang="en-US" sz="2000" dirty="0"/>
           </a:p>
@@ -7939,7 +8575,7 @@
                 <a:ea typeface="Segoe UI" pitchFamily="34" charset="-122"/>
                 <a:cs typeface="Segoe UI" pitchFamily="34" charset="-120"/>
               </a:rPr>
-              <a:t>What to do today</a:t>
+              <a:t>What's coming</a:t>
             </a:r>
             <a:endParaRPr lang="en-US" sz="3600" dirty="0"/>
           </a:p>
@@ -8032,7 +8668,7 @@
                 <a:ea typeface="Segoe UI" pitchFamily="34" charset="-122"/>
                 <a:cs typeface="Segoe UI" pitchFamily="34" charset="-120"/>
               </a:rPr>
-              <a:t>Set service.name on workloads you own — OTEL_SERVICE_NAME and OTEL_RESOURCE_ATTRIBUTES</a:t>
+              <a:t>Automatic URL normalization — closes the GET /* gap</a:t>
             </a:r>
             <a:endParaRPr lang="en-US" sz="2000" dirty="0"/>
           </a:p>
@@ -8053,7 +8689,7 @@
                 <a:ea typeface="Segoe UI" pitchFamily="34" charset="-122"/>
                 <a:cs typeface="Segoe UI" pitchFamily="34" charset="-120"/>
               </a:rPr>
-              <a:t>Write DQL metric-first — skip the entity table unless you need ownership or tags</a:t>
+              <a:t>Pipeline-side naming in OpenPipeline — admin writes a rule, dt.service.name set on every span centrally</a:t>
             </a:r>
             <a:endParaRPr lang="en-US" sz="2000" dirty="0"/>
           </a:p>
@@ -8074,7 +8710,7 @@
                 <a:ea typeface="Segoe UI" pitchFamily="34" charset="-122"/>
                 <a:cs typeface="Segoe UI" pitchFamily="34" charset="-120"/>
               </a:rPr>
-              <a:t>Don't invest new effort in Services Classic naming rules</a:t>
+              <a:t>SERVICE_DEPLOYMENT — per-env entity orthogonal to SERVICE; staging vs prod without splitting identity (maps to Datadog's service+env+version)</a:t>
             </a:r>
             <a:endParaRPr lang="en-US" sz="2000" dirty="0"/>
           </a:p>
@@ -8095,7 +8731,7 @@
                 <a:ea typeface="Segoe UI" pitchFamily="34" charset="-122"/>
                 <a:cs typeface="Segoe UI" pitchFamily="34" charset="-120"/>
               </a:rPr>
-              <a:t>Don't double down on splitting rules for per-env views — use dimensions now, SERVICE_DEPLOYMENT for the rest</a:t>
+              <a:t>Primary Fields as metric dimensions — k8s.cluster.name, tags become first-class on service metrics</a:t>
             </a:r>
             <a:endParaRPr lang="en-US" sz="2000" dirty="0"/>
           </a:p>
@@ -8116,7 +8752,49 @@
                 <a:ea typeface="Segoe UI" pitchFamily="34" charset="-122"/>
                 <a:cs typeface="Segoe UI" pitchFamily="34" charset="-120"/>
               </a:rPr>
-              <a:t>Pick names durable enough to survive the SDv2 move and the pipeline-naming move</a:t>
+              <a:t>Services app rewire to timeseries-first — list + detail pages go query-led</a:t>
+            </a:r>
+            <a:endParaRPr lang="en-US" sz="2000" dirty="0"/>
+          </a:p>
+          <a:p>
+            <a:pPr marL="342900" indent="-342900">
+              <a:lnSpc>
+                <a:spcPct val="120000"/>
+              </a:lnSpc>
+              <a:buSzPct val="100000"/>
+              <a:buChar char="•"/>
+            </a:pPr>
+            <a:r>
+              <a:rPr lang="en-US" sz="2000" dirty="0">
+                <a:solidFill>
+                  <a:srgbClr val="FFFFFF"/>
+                </a:solidFill>
+                <a:latin typeface="Segoe UI" pitchFamily="34" charset="0"/>
+                <a:ea typeface="Segoe UI" pitchFamily="34" charset="-122"/>
+                <a:cs typeface="Segoe UI" pitchFamily="34" charset="-120"/>
+              </a:rPr>
+              <a:t>dt.service.database.* linked to real DB entities — future SDv2-for-OneAgent release; span data is already shaped correctly</a:t>
+            </a:r>
+            <a:endParaRPr lang="en-US" sz="2000" dirty="0"/>
+          </a:p>
+          <a:p>
+            <a:pPr marL="342900" indent="-342900">
+              <a:lnSpc>
+                <a:spcPct val="120000"/>
+              </a:lnSpc>
+              <a:buSzPct val="100000"/>
+              <a:buChar char="•"/>
+            </a:pPr>
+            <a:r>
+              <a:rPr lang="en-US" sz="2000" dirty="0">
+                <a:solidFill>
+                  <a:srgbClr val="FFFFFF"/>
+                </a:solidFill>
+                <a:latin typeface="Segoe UI" pitchFamily="34" charset="0"/>
+                <a:ea typeface="Segoe UI" pitchFamily="34" charset="-122"/>
+                <a:cs typeface="Segoe UI" pitchFamily="34" charset="-120"/>
+              </a:rPr>
+              <a:t>Messaging → broker entity — same idea, further out</a:t>
             </a:r>
             <a:endParaRPr lang="en-US" sz="2000" dirty="0"/>
           </a:p>
@@ -8180,7 +8858,7 @@
                 <a:ea typeface="Segoe UI" pitchFamily="34" charset="-122"/>
                 <a:cs typeface="Segoe UI" pitchFamily="34" charset="-120"/>
               </a:rPr>
-              <a:t>See it live</a:t>
+              <a:t>What to do today</a:t>
             </a:r>
             <a:endParaRPr lang="en-US" sz="3600" dirty="0"/>
           </a:p>
@@ -8245,6 +8923,247 @@
         <p:spPr>
           <a:xfrm>
             <a:off x="457200" y="1463040"/>
+            <a:ext cx="8229600" cy="3291840"/>
+          </a:xfrm>
+          <a:prstGeom prst="rect">
+            <a:avLst/>
+          </a:prstGeom>
+          <a:noFill/>
+          <a:ln/>
+        </p:spPr>
+        <p:txBody>
+          <a:bodyPr wrap="square" lIns="0" tIns="0" rIns="0" bIns="0" rtlCol="0" anchor="t"/>
+          <a:lstStyle/>
+          <a:p>
+            <a:pPr marL="342900" indent="-342900">
+              <a:lnSpc>
+                <a:spcPct val="120000"/>
+              </a:lnSpc>
+              <a:buSzPct val="100000"/>
+              <a:buChar char="•"/>
+            </a:pPr>
+            <a:r>
+              <a:rPr lang="en-US" sz="2000" dirty="0">
+                <a:solidFill>
+                  <a:srgbClr val="FFFFFF"/>
+                </a:solidFill>
+                <a:latin typeface="Segoe UI" pitchFamily="34" charset="0"/>
+                <a:ea typeface="Segoe UI" pitchFamily="34" charset="-122"/>
+                <a:cs typeface="Segoe UI" pitchFamily="34" charset="-120"/>
+              </a:rPr>
+              <a:t>Set service.name on workloads you own — OTEL_SERVICE_NAME and OTEL_RESOURCE_ATTRIBUTES</a:t>
+            </a:r>
+            <a:endParaRPr lang="en-US" sz="2000" dirty="0"/>
+          </a:p>
+          <a:p>
+            <a:pPr marL="342900" indent="-342900">
+              <a:lnSpc>
+                <a:spcPct val="120000"/>
+              </a:lnSpc>
+              <a:buSzPct val="100000"/>
+              <a:buChar char="•"/>
+            </a:pPr>
+            <a:r>
+              <a:rPr lang="en-US" sz="2000" dirty="0">
+                <a:solidFill>
+                  <a:srgbClr val="FFFFFF"/>
+                </a:solidFill>
+                <a:latin typeface="Segoe UI" pitchFamily="34" charset="0"/>
+                <a:ea typeface="Segoe UI" pitchFamily="34" charset="-122"/>
+                <a:cs typeface="Segoe UI" pitchFamily="34" charset="-120"/>
+              </a:rPr>
+              <a:t>Write DQL metric-first — skip the entity table unless you need ownership or tags</a:t>
+            </a:r>
+            <a:endParaRPr lang="en-US" sz="2000" dirty="0"/>
+          </a:p>
+          <a:p>
+            <a:pPr marL="342900" indent="-342900">
+              <a:lnSpc>
+                <a:spcPct val="120000"/>
+              </a:lnSpc>
+              <a:buSzPct val="100000"/>
+              <a:buChar char="•"/>
+            </a:pPr>
+            <a:r>
+              <a:rPr lang="en-US" sz="2000" dirty="0">
+                <a:solidFill>
+                  <a:srgbClr val="FFFFFF"/>
+                </a:solidFill>
+                <a:latin typeface="Segoe UI" pitchFamily="34" charset="0"/>
+                <a:ea typeface="Segoe UI" pitchFamily="34" charset="-122"/>
+                <a:cs typeface="Segoe UI" pitchFamily="34" charset="-120"/>
+              </a:rPr>
+              <a:t>Don't invest new effort in Services Classic naming rules</a:t>
+            </a:r>
+            <a:endParaRPr lang="en-US" sz="2000" dirty="0"/>
+          </a:p>
+          <a:p>
+            <a:pPr marL="342900" indent="-342900">
+              <a:lnSpc>
+                <a:spcPct val="120000"/>
+              </a:lnSpc>
+              <a:buSzPct val="100000"/>
+              <a:buChar char="•"/>
+            </a:pPr>
+            <a:r>
+              <a:rPr lang="en-US" sz="2000" dirty="0">
+                <a:solidFill>
+                  <a:srgbClr val="FFFFFF"/>
+                </a:solidFill>
+                <a:latin typeface="Segoe UI" pitchFamily="34" charset="0"/>
+                <a:ea typeface="Segoe UI" pitchFamily="34" charset="-122"/>
+                <a:cs typeface="Segoe UI" pitchFamily="34" charset="-120"/>
+              </a:rPr>
+              <a:t>Don't double down on splitting rules for per-env views — use dimensions now, SERVICE_DEPLOYMENT for the rest</a:t>
+            </a:r>
+            <a:endParaRPr lang="en-US" sz="2000" dirty="0"/>
+          </a:p>
+          <a:p>
+            <a:pPr marL="342900" indent="-342900">
+              <a:lnSpc>
+                <a:spcPct val="120000"/>
+              </a:lnSpc>
+              <a:buSzPct val="100000"/>
+              <a:buChar char="•"/>
+            </a:pPr>
+            <a:r>
+              <a:rPr lang="en-US" sz="2000" dirty="0">
+                <a:solidFill>
+                  <a:srgbClr val="FFFFFF"/>
+                </a:solidFill>
+                <a:latin typeface="Segoe UI" pitchFamily="34" charset="0"/>
+                <a:ea typeface="Segoe UI" pitchFamily="34" charset="-122"/>
+                <a:cs typeface="Segoe UI" pitchFamily="34" charset="-120"/>
+              </a:rPr>
+              <a:t>Pick names durable enough to survive the SDv2 move and the pipeline-naming move</a:t>
+            </a:r>
+            <a:endParaRPr lang="en-US" sz="2000" dirty="0"/>
+          </a:p>
+        </p:txBody>
+      </p:sp>
+    </p:spTree>
+  </p:cSld>
+  <p:clrMapOvr>
+    <a:masterClrMapping/>
+  </p:clrMapOvr>
+</p:sld>
+</file>
+
+<file path=ppt/slides/slide22.xml><?xml version="1.0" encoding="utf-8"?>
+<p:sld xmlns:a="http://schemas.openxmlformats.org/drawingml/2006/main" xmlns:r="http://schemas.openxmlformats.org/officeDocument/2006/relationships" xmlns:p="http://schemas.openxmlformats.org/presentationml/2006/main">
+  <p:cSld name="Slide 22">
+    <p:spTree>
+      <p:nvGrpSpPr>
+        <p:cNvPr id="1" name=""/>
+        <p:cNvGrpSpPr/>
+        <p:nvPr/>
+      </p:nvGrpSpPr>
+      <p:grpSpPr>
+        <a:xfrm>
+          <a:off x="0" y="0"/>
+          <a:ext cx="0" cy="0"/>
+          <a:chOff x="0" y="0"/>
+          <a:chExt cx="0" cy="0"/>
+        </a:xfrm>
+      </p:grpSpPr>
+      <p:sp>
+        <p:nvSpPr>
+          <p:cNvPr id="2" name="Text 0"/>
+          <p:cNvSpPr/>
+          <p:nvPr/>
+        </p:nvSpPr>
+        <p:spPr>
+          <a:xfrm>
+            <a:off x="457200" y="457200"/>
+            <a:ext cx="8229600" cy="640080"/>
+          </a:xfrm>
+          <a:prstGeom prst="rect">
+            <a:avLst/>
+          </a:prstGeom>
+          <a:noFill/>
+          <a:ln/>
+        </p:spPr>
+        <p:txBody>
+          <a:bodyPr wrap="square" rtlCol="0" anchor="ctr"/>
+          <a:lstStyle/>
+          <a:p>
+            <a:pPr indent="0" marL="0">
+              <a:buNone/>
+            </a:pPr>
+            <a:r>
+              <a:rPr lang="en-US" sz="3600" b="1" dirty="0">
+                <a:solidFill>
+                  <a:srgbClr val="FFFFFF"/>
+                </a:solidFill>
+                <a:latin typeface="Segoe UI" pitchFamily="34" charset="0"/>
+                <a:ea typeface="Segoe UI" pitchFamily="34" charset="-122"/>
+                <a:cs typeface="Segoe UI" pitchFamily="34" charset="-120"/>
+              </a:rPr>
+              <a:t>See it live</a:t>
+            </a:r>
+            <a:endParaRPr lang="en-US" sz="3600" dirty="0"/>
+          </a:p>
+        </p:txBody>
+      </p:sp>
+      <p:sp>
+        <p:nvSpPr>
+          <p:cNvPr id="3" name="Shape 1"/>
+          <p:cNvSpPr/>
+          <p:nvPr/>
+        </p:nvSpPr>
+        <p:spPr>
+          <a:xfrm>
+            <a:off x="457200" y="1188720"/>
+            <a:ext cx="4114800" cy="54864"/>
+          </a:xfrm>
+          <a:prstGeom prst="rect">
+            <a:avLst/>
+          </a:prstGeom>
+          <a:solidFill>
+            <a:srgbClr val="00A1E0"/>
+          </a:solidFill>
+          <a:ln w="12700">
+            <a:solidFill>
+              <a:srgbClr val="00A1E0"/>
+            </a:solidFill>
+            <a:prstDash val="solid"/>
+          </a:ln>
+        </p:spPr>
+      </p:sp>
+      <p:sp>
+        <p:nvSpPr>
+          <p:cNvPr id="4" name="Shape 2"/>
+          <p:cNvSpPr/>
+          <p:nvPr/>
+        </p:nvSpPr>
+        <p:spPr>
+          <a:xfrm>
+            <a:off x="4572000" y="1188720"/>
+            <a:ext cx="4114800" cy="54864"/>
+          </a:xfrm>
+          <a:prstGeom prst="rect">
+            <a:avLst/>
+          </a:prstGeom>
+          <a:solidFill>
+            <a:srgbClr val="B455B6"/>
+          </a:solidFill>
+          <a:ln w="12700">
+            <a:solidFill>
+              <a:srgbClr val="B455B6"/>
+            </a:solidFill>
+            <a:prstDash val="solid"/>
+          </a:ln>
+        </p:spPr>
+      </p:sp>
+      <p:sp>
+        <p:nvSpPr>
+          <p:cNvPr id="5" name="Text 3"/>
+          <p:cNvSpPr/>
+          <p:nvPr/>
+        </p:nvSpPr>
+        <p:spPr>
+          <a:xfrm>
+            <a:off x="457200" y="1463040"/>
             <a:ext cx="8229600" cy="484632"/>
           </a:xfrm>
           <a:prstGeom prst="rect">
@@ -8311,7 +9230,7 @@
                 <a:ea typeface="Segoe UI" pitchFamily="34" charset="-122"/>
                 <a:cs typeface="Segoe UI" pitchFamily="34" charset="-120"/>
               </a:rPr>
-              <a:t>) — Questions 5-10</a:t>
+              <a:t>) — Questions 5 through 9c</a:t>
             </a:r>
             <a:endParaRPr lang="en-US" sz="2000" dirty="0"/>
           </a:p>
@@ -8326,7 +9245,7 @@
         <p:spPr>
           <a:xfrm>
             <a:off x="457200" y="2130552"/>
-            <a:ext cx="8229600" cy="2057400"/>
+            <a:ext cx="8229600" cy="2624328"/>
           </a:xfrm>
           <a:prstGeom prst="rect">
             <a:avLst/>
@@ -8418,6 +9337,48 @@
                 <a:cs typeface="Segoe UI" pitchFamily="34" charset="-120"/>
               </a:rPr>
               <a:t>Messaging + DB as dimensions on the caller</a:t>
+            </a:r>
+            <a:endParaRPr lang="en-US" sz="2000" dirty="0"/>
+          </a:p>
+          <a:p>
+            <a:pPr marL="342900" indent="-342900">
+              <a:lnSpc>
+                <a:spcPct val="120000"/>
+              </a:lnSpc>
+              <a:buSzPct val="100000"/>
+              <a:buChar char="•"/>
+            </a:pPr>
+            <a:r>
+              <a:rPr lang="en-US" sz="2000" dirty="0">
+                <a:solidFill>
+                  <a:srgbClr val="FFFFFF"/>
+                </a:solidFill>
+                <a:latin typeface="Segoe UI" pitchFamily="34" charset="0"/>
+                <a:ea typeface="Segoe UI" pitchFamily="34" charset="-122"/>
+                <a:cs typeface="Segoe UI" pitchFamily="34" charset="-120"/>
+              </a:rPr>
+              <a:t>Q9b — Postgres: client-side JDBC view vs. source-side postgres.* metrics from the extension</a:t>
+            </a:r>
+            <a:endParaRPr lang="en-US" sz="2000" dirty="0"/>
+          </a:p>
+          <a:p>
+            <a:pPr marL="342900" indent="-342900">
+              <a:lnSpc>
+                <a:spcPct val="120000"/>
+              </a:lnSpc>
+              <a:buSzPct val="100000"/>
+              <a:buChar char="•"/>
+            </a:pPr>
+            <a:r>
+              <a:rPr lang="en-US" sz="2000" dirty="0">
+                <a:solidFill>
+                  <a:srgbClr val="FFFFFF"/>
+                </a:solidFill>
+                <a:latin typeface="Segoe UI" pitchFamily="34" charset="0"/>
+                <a:ea typeface="Segoe UI" pitchFamily="34" charset="-122"/>
+                <a:cs typeface="Segoe UI" pitchFamily="34" charset="-120"/>
+              </a:rPr>
+              <a:t>Q9c — Kafka: client-side messaging.process.* vs. source-side kafka.* metrics from OneAgent's built-in sensor</a:t>
             </a:r>
             <a:endParaRPr lang="en-US" sz="2000" dirty="0"/>
           </a:p>

--- a/presentation/sdv2-presentation.pptx
+++ b/presentation/sdv2-presentation.pptx
@@ -27,9 +27,10 @@
     <p:sldId id="275" r:id="rId21"/>
     <p:sldId id="276" r:id="rId22"/>
     <p:sldId id="277" r:id="rId23"/>
+    <p:sldId id="278" r:id="rId24"/>
   </p:sldIdLst>
   <p:notesMasterIdLst>
-    <p:notesMasterId r:id="rId24"/>
+    <p:notesMasterId r:id="rId25"/>
   </p:notesMasterIdLst>
   <p:sldSz cx="9144000" cy="5143500"/>
   <p:notesSz cx="5143500" cy="9144000"/>
@@ -1779,6 +1780,94 @@
             <a:fld id="{F7021451-1387-4CA6-816F-3879F97B5CBC}" type="slidenum">
               <a:rPr lang="en-US"/>
               <a:t>22</a:t>
+            </a:fld>
+            <a:endParaRPr lang="en-US"/>
+          </a:p>
+        </p:txBody>
+      </p:sp>
+    </p:spTree>
+    <p:extLst>
+      <p:ext uri="{BB962C8B-B14F-4D97-AF65-F5344CB8AC3E}">
+        <p14:creationId xmlns:p14="http://schemas.microsoft.com/office/powerpoint/2010/main" val="1024086991"/>
+      </p:ext>
+    </p:extLst>
+  </p:cSld>
+  <p:clrMapOvr>
+    <a:masterClrMapping/>
+  </p:clrMapOvr>
+</p:notes>
+</file>
+
+<file path=ppt/notesSlides/notesSlide23.xml><?xml version="1.0" encoding="utf-8"?>
+<p:notes xmlns:a="http://schemas.openxmlformats.org/drawingml/2006/main" xmlns:r="http://schemas.openxmlformats.org/officeDocument/2006/relationships" xmlns:p="http://schemas.openxmlformats.org/presentationml/2006/main">
+  <p:cSld>
+    <p:spTree>
+      <p:nvGrpSpPr>
+        <p:cNvPr id="1" name=""/>
+        <p:cNvGrpSpPr/>
+        <p:nvPr/>
+      </p:nvGrpSpPr>
+      <p:grpSpPr>
+        <a:xfrm>
+          <a:off x="0" y="0"/>
+          <a:ext cx="0" cy="0"/>
+          <a:chOff x="0" y="0"/>
+          <a:chExt cx="0" cy="0"/>
+        </a:xfrm>
+      </p:grpSpPr>
+      <p:sp>
+        <p:nvSpPr>
+          <p:cNvPr id="2" name="Slide Image Placeholder 1"/>
+          <p:cNvSpPr>
+            <a:spLocks noGrp="1" noRot="1" noChangeAspect="1"/>
+          </p:cNvSpPr>
+          <p:nvPr>
+            <p:ph type="sldImg"/>
+          </p:nvPr>
+        </p:nvSpPr>
+        <p:spPr/>
+      </p:sp>
+      <p:sp>
+        <p:nvSpPr>
+          <p:cNvPr id="3" name="Notes Placeholder 2"/>
+          <p:cNvSpPr>
+            <a:spLocks noGrp="1"/>
+          </p:cNvSpPr>
+          <p:nvPr>
+            <p:ph type="body" idx="1"/>
+          </p:nvPr>
+        </p:nvSpPr>
+        <p:spPr/>
+        <p:txBody>
+          <a:bodyPr/>
+          <a:lstStyle/>
+          <a:p>
+            <a:r>
+              <a:rPr lang="en-US" dirty="0"/>
+              <a:t/>
+            </a:r>
+            <a:endParaRPr lang="en-US" dirty="0"/>
+          </a:p>
+        </p:txBody>
+      </p:sp>
+      <p:sp>
+        <p:nvSpPr>
+          <p:cNvPr id="4" name="Slide Number Placeholder 3"/>
+          <p:cNvSpPr>
+            <a:spLocks noGrp="1"/>
+          </p:cNvSpPr>
+          <p:nvPr>
+            <p:ph type="sldNum" sz="quarter" idx="10"/>
+          </p:nvPr>
+        </p:nvSpPr>
+        <p:spPr/>
+        <p:txBody>
+          <a:bodyPr/>
+          <a:lstStyle/>
+          <a:p>
+            <a:fld id="{F7021451-1387-4CA6-816F-3879F97B5CBC}" type="slidenum">
+              <a:rPr lang="en-US"/>
+              <a:t>23</a:t>
             </a:fld>
             <a:endParaRPr lang="en-US"/>
           </a:p>
@@ -2926,7 +3015,7 @@
                 <a:ea typeface="Segoe UI" pitchFamily="34" charset="-122"/>
                 <a:cs typeface="Segoe UI" pitchFamily="34" charset="-120"/>
               </a:rPr>
-              <a:t>The `service.name` knob works on both models</a:t>
+              <a:t>Detour: service naming rules are being deprecated</a:t>
             </a:r>
             <a:endParaRPr lang="en-US" sz="3600" dirty="0"/>
           </a:p>
@@ -3015,52 +3104,67 @@
                 <a:ea typeface="Segoe UI" pitchFamily="34" charset="-122"/>
                 <a:cs typeface="Segoe UI" pitchFamily="34" charset="-120"/>
               </a:rPr>
-              <a:t>Set </a:t>
+              <a:t>This is a </a:t>
             </a:r>
             <a:pPr indent="0" marL="0">
               <a:buNone/>
             </a:pPr>
             <a:r>
-              <a:rPr lang="en-US" sz="1800" dirty="0">
-                <a:solidFill>
-                  <a:srgbClr val="FFFFFF"/>
-                </a:solidFill>
-                <a:latin typeface="Consolas" pitchFamily="34" charset="0"/>
-                <a:ea typeface="Consolas" pitchFamily="34" charset="-122"/>
-                <a:cs typeface="Consolas" pitchFamily="34" charset="-120"/>
-              </a:rPr>
-              <a:t>OTEL_SERVICE_NAME</a:t>
-            </a:r>
-            <a:pPr indent="0" marL="0">
-              <a:buNone/>
-            </a:pPr>
-            <a:r>
-              <a:rPr lang="en-US" sz="2000" dirty="0">
-                <a:solidFill>
-                  <a:srgbClr val="FFFFFF"/>
+              <a:rPr lang="en-US" sz="2000" b="1" dirty="0">
+                <a:solidFill>
+                  <a:srgbClr val="00A1E0"/>
                 </a:solidFill>
                 <a:latin typeface="Segoe UI" pitchFamily="34" charset="0"/>
                 <a:ea typeface="Segoe UI" pitchFamily="34" charset="-122"/>
                 <a:cs typeface="Segoe UI" pitchFamily="34" charset="-120"/>
               </a:rPr>
-              <a:t> on the container. The 2026-Q1 detection-layer fix </a:t>
+              <a:t>separate story</a:t>
             </a:r>
             <a:pPr indent="0" marL="0">
               <a:buNone/>
             </a:pPr>
             <a:r>
-              <a:rPr lang="en-US" sz="2000" b="1" dirty="0">
-                <a:solidFill>
-                  <a:srgbClr val="00A1E0"/>
+              <a:rPr lang="en-US" sz="2000" dirty="0">
+                <a:solidFill>
+                  <a:srgbClr val="FFFFFF"/>
                 </a:solidFill>
                 <a:latin typeface="Segoe UI" pitchFamily="34" charset="0"/>
                 <a:ea typeface="Segoe UI" pitchFamily="34" charset="-122"/>
                 <a:cs typeface="Segoe UI" pitchFamily="34" charset="-120"/>
               </a:rPr>
-              <a:t>prefixes every SDv1 fragment</a:t>
-            </a:r>
-            <a:pPr indent="0" marL="0">
-              <a:buNone/>
+              <a:t> from the SDv1→SDv2 collapse above. Both happen to show up on the demo tenant, but they're independent.</a:t>
+            </a:r>
+            <a:endParaRPr lang="en-US" sz="2000" dirty="0"/>
+          </a:p>
+        </p:txBody>
+      </p:sp>
+      <p:sp>
+        <p:nvSpPr>
+          <p:cNvPr id="6" name="Text 4"/>
+          <p:cNvSpPr/>
+          <p:nvPr/>
+        </p:nvSpPr>
+        <p:spPr>
+          <a:xfrm>
+            <a:off x="457200" y="2752344"/>
+            <a:ext cx="8229600" cy="2002536"/>
+          </a:xfrm>
+          <a:prstGeom prst="rect">
+            <a:avLst/>
+          </a:prstGeom>
+          <a:noFill/>
+          <a:ln/>
+        </p:spPr>
+        <p:txBody>
+          <a:bodyPr wrap="square" lIns="0" tIns="0" rIns="0" bIns="0" rtlCol="0" anchor="t"/>
+          <a:lstStyle/>
+          <a:p>
+            <a:pPr marL="342900" indent="-342900">
+              <a:lnSpc>
+                <a:spcPct val="120000"/>
+              </a:lnSpc>
+              <a:buSzPct val="100000"/>
+              <a:buChar char="•"/>
             </a:pPr>
             <a:r>
               <a:rPr lang="en-US" sz="2000" dirty="0">
@@ -3071,15 +3175,171 @@
                 <a:ea typeface="Segoe UI" pitchFamily="34" charset="-122"/>
                 <a:cs typeface="Segoe UI" pitchFamily="34" charset="-120"/>
               </a:rPr>
-              <a:t> with the chosen name:</a:t>
+              <a:t>Dynatrace's builtin:naming.services rules are going away — the Services app is moving off them</a:t>
             </a:r>
             <a:endParaRPr lang="en-US" sz="2000" dirty="0"/>
           </a:p>
+          <a:p>
+            <a:pPr marL="342900" indent="-342900">
+              <a:lnSpc>
+                <a:spcPct val="120000"/>
+              </a:lnSpc>
+              <a:buSzPct val="100000"/>
+              <a:buChar char="•"/>
+            </a:pPr>
+            <a:r>
+              <a:rPr lang="en-US" sz="2000" dirty="0">
+                <a:solidFill>
+                  <a:srgbClr val="FFFFFF"/>
+                </a:solidFill>
+                <a:latin typeface="Segoe UI" pitchFamily="34" charset="0"/>
+                <a:ea typeface="Segoe UI" pitchFamily="34" charset="-122"/>
+                <a:cs typeface="Segoe UI" pitchFamily="34" charset="-120"/>
+              </a:rPr>
+              <a:t>SDv1 services that relied on naming rules to mask ugly detected names (:8080, /) lose their friendly labels</a:t>
+            </a:r>
+            <a:endParaRPr lang="en-US" sz="2000" dirty="0"/>
+          </a:p>
+          <a:p>
+            <a:pPr marL="342900" indent="-342900">
+              <a:lnSpc>
+                <a:spcPct val="120000"/>
+              </a:lnSpc>
+              <a:buSzPct val="100000"/>
+              <a:buChar char="•"/>
+            </a:pPr>
+            <a:r>
+              <a:rPr lang="en-US" sz="2000" dirty="0">
+                <a:solidFill>
+                  <a:srgbClr val="FFFFFF"/>
+                </a:solidFill>
+                <a:latin typeface="Segoe UI" pitchFamily="34" charset="0"/>
+                <a:ea typeface="Segoe UI" pitchFamily="34" charset="-122"/>
+                <a:cs typeface="Segoe UI" pitchFamily="34" charset="-120"/>
+              </a:rPr>
+              <a:t>For customers staying on SDv1, that's a real regression</a:t>
+            </a:r>
+            <a:endParaRPr lang="en-US" sz="2000" dirty="0"/>
+          </a:p>
         </p:txBody>
+      </p:sp>
+    </p:spTree>
+  </p:cSld>
+  <p:clrMapOvr>
+    <a:masterClrMapping/>
+  </p:clrMapOvr>
+</p:sld>
+</file>
+
+<file path=ppt/slides/slide11.xml><?xml version="1.0" encoding="utf-8"?>
+<p:sld xmlns:a="http://schemas.openxmlformats.org/drawingml/2006/main" xmlns:r="http://schemas.openxmlformats.org/officeDocument/2006/relationships" xmlns:p="http://schemas.openxmlformats.org/presentationml/2006/main">
+  <p:cSld name="Slide 11">
+    <p:spTree>
+      <p:nvGrpSpPr>
+        <p:cNvPr id="1" name=""/>
+        <p:cNvGrpSpPr/>
+        <p:nvPr/>
+      </p:nvGrpSpPr>
+      <p:grpSpPr>
+        <a:xfrm>
+          <a:off x="0" y="0"/>
+          <a:ext cx="0" cy="0"/>
+          <a:chOff x="0" y="0"/>
+          <a:chExt cx="0" cy="0"/>
+        </a:xfrm>
+      </p:grpSpPr>
+      <p:sp>
+        <p:nvSpPr>
+          <p:cNvPr id="2" name="Text 0"/>
+          <p:cNvSpPr/>
+          <p:nvPr/>
+        </p:nvSpPr>
+        <p:spPr>
+          <a:xfrm>
+            <a:off x="457200" y="457200"/>
+            <a:ext cx="8229600" cy="640080"/>
+          </a:xfrm>
+          <a:prstGeom prst="rect">
+            <a:avLst/>
+          </a:prstGeom>
+          <a:noFill/>
+          <a:ln/>
+        </p:spPr>
+        <p:txBody>
+          <a:bodyPr wrap="square" rtlCol="0" anchor="ctr"/>
+          <a:lstStyle/>
+          <a:p>
+            <a:pPr indent="0" marL="0">
+              <a:buNone/>
+            </a:pPr>
+            <a:r>
+              <a:rPr lang="en-US" sz="3600" b="1" dirty="0">
+                <a:solidFill>
+                  <a:srgbClr val="FFFFFF"/>
+                </a:solidFill>
+                <a:latin typeface="Segoe UI" pitchFamily="34" charset="0"/>
+                <a:ea typeface="Segoe UI" pitchFamily="34" charset="-122"/>
+                <a:cs typeface="Segoe UI" pitchFamily="34" charset="-120"/>
+              </a:rPr>
+              <a:t>What the prefix fix looks like</a:t>
+            </a:r>
+            <a:endParaRPr lang="en-US" sz="3600" dirty="0"/>
+          </a:p>
+        </p:txBody>
+      </p:sp>
+      <p:sp>
+        <p:nvSpPr>
+          <p:cNvPr id="3" name="Shape 1"/>
+          <p:cNvSpPr/>
+          <p:nvPr/>
+        </p:nvSpPr>
+        <p:spPr>
+          <a:xfrm>
+            <a:off x="457200" y="1188720"/>
+            <a:ext cx="4114800" cy="54864"/>
+          </a:xfrm>
+          <a:prstGeom prst="rect">
+            <a:avLst/>
+          </a:prstGeom>
+          <a:solidFill>
+            <a:srgbClr val="00A1E0"/>
+          </a:solidFill>
+          <a:ln w="12700">
+            <a:solidFill>
+              <a:srgbClr val="00A1E0"/>
+            </a:solidFill>
+            <a:prstDash val="solid"/>
+          </a:ln>
+        </p:spPr>
+      </p:sp>
+      <p:sp>
+        <p:nvSpPr>
+          <p:cNvPr id="4" name="Shape 2"/>
+          <p:cNvSpPr/>
+          <p:nvPr/>
+        </p:nvSpPr>
+        <p:spPr>
+          <a:xfrm>
+            <a:off x="4572000" y="1188720"/>
+            <a:ext cx="4114800" cy="54864"/>
+          </a:xfrm>
+          <a:prstGeom prst="rect">
+            <a:avLst/>
+          </a:prstGeom>
+          <a:solidFill>
+            <a:srgbClr val="B455B6"/>
+          </a:solidFill>
+          <a:ln w="12700">
+            <a:solidFill>
+              <a:srgbClr val="B455B6"/>
+            </a:solidFill>
+            <a:prstDash val="solid"/>
+          </a:ln>
+        </p:spPr>
       </p:sp>
       <p:graphicFrame>
         <p:nvGraphicFramePr>
-          <p:cNvPr id="11" name="Table 0"/>
+          <p:cNvPr id="12" name="Table 0"/>
           <p:cNvGraphicFramePr>
             <a:graphicFrameLocks noGrp="1"/>
           </p:cNvGraphicFramePr>
@@ -3092,7 +3352,7 @@
           </p:nvPr>
         </p:nvGraphicFramePr>
         <p:xfrm>
-          <a:off x="457200" y="2752344"/>
+          <a:off x="457200" y="1463040"/>
           <a:ext cx="8229600" cy="914400"/>
         </p:xfrm>
         <a:graphic>
@@ -3728,14 +3988,14 @@
       </p:graphicFrame>
       <p:sp>
         <p:nvSpPr>
-          <p:cNvPr id="7" name="Text 4"/>
+          <p:cNvPr id="6" name="Text 3"/>
           <p:cNvSpPr/>
           <p:nvPr/>
         </p:nvSpPr>
         <p:spPr>
           <a:xfrm>
-            <a:off x="457200" y="4645152"/>
-            <a:ext cx="8229600" cy="109728"/>
+            <a:off x="457200" y="3355848"/>
+            <a:ext cx="8229600" cy="1399032"/>
           </a:xfrm>
           <a:prstGeom prst="rect">
             <a:avLst/>
@@ -3763,7 +4023,7 @@
                 <a:ea typeface="Segoe UI" pitchFamily="34" charset="-122"/>
                 <a:cs typeface="Segoe UI" pitchFamily="34" charset="-120"/>
               </a:rPr>
-              <a:t>service.name is now a first-class metric dimension: filter service.name == "orders-api" works, no lookup</a:t>
+              <a:t>service.name is now a first-class metric dimension — filter service.name == "orders-api" cuts across all fragments with no entity lookup</a:t>
             </a:r>
             <a:endParaRPr lang="en-US" sz="2000" dirty="0"/>
           </a:p>
@@ -3784,206 +4044,7 @@
                 <a:ea typeface="Segoe UI" pitchFamily="34" charset="-122"/>
                 <a:cs typeface="Segoe UI" pitchFamily="34" charset="-120"/>
               </a:rPr>
-              <a:t>Under SDv2 the same env var replaces the default &lt;namespace&gt; -- &lt;workload&gt; name outright</a:t>
-            </a:r>
-            <a:endParaRPr lang="en-US" sz="2000" dirty="0"/>
-          </a:p>
-        </p:txBody>
-      </p:sp>
-    </p:spTree>
-  </p:cSld>
-  <p:clrMapOvr>
-    <a:masterClrMapping/>
-  </p:clrMapOvr>
-</p:sld>
-</file>
-
-<file path=ppt/slides/slide11.xml><?xml version="1.0" encoding="utf-8"?>
-<p:sld xmlns:a="http://schemas.openxmlformats.org/drawingml/2006/main" xmlns:r="http://schemas.openxmlformats.org/officeDocument/2006/relationships" xmlns:p="http://schemas.openxmlformats.org/presentationml/2006/main">
-  <p:cSld name="Slide 11">
-    <p:spTree>
-      <p:nvGrpSpPr>
-        <p:cNvPr id="1" name=""/>
-        <p:cNvGrpSpPr/>
-        <p:nvPr/>
-      </p:nvGrpSpPr>
-      <p:grpSpPr>
-        <a:xfrm>
-          <a:off x="0" y="0"/>
-          <a:ext cx="0" cy="0"/>
-          <a:chOff x="0" y="0"/>
-          <a:chExt cx="0" cy="0"/>
-        </a:xfrm>
-      </p:grpSpPr>
-      <p:sp>
-        <p:nvSpPr>
-          <p:cNvPr id="2" name="Text 0"/>
-          <p:cNvSpPr/>
-          <p:nvPr/>
-        </p:nvSpPr>
-        <p:spPr>
-          <a:xfrm>
-            <a:off x="457200" y="457200"/>
-            <a:ext cx="8229600" cy="640080"/>
-          </a:xfrm>
-          <a:prstGeom prst="rect">
-            <a:avLst/>
-          </a:prstGeom>
-          <a:noFill/>
-          <a:ln/>
-        </p:spPr>
-        <p:txBody>
-          <a:bodyPr wrap="square" rtlCol="0" anchor="ctr"/>
-          <a:lstStyle/>
-          <a:p>
-            <a:pPr indent="0" marL="0">
-              <a:buNone/>
-            </a:pPr>
-            <a:r>
-              <a:rPr lang="en-US" sz="3600" b="1" dirty="0">
-                <a:solidFill>
-                  <a:srgbClr val="FFFFFF"/>
-                </a:solidFill>
-                <a:latin typeface="Segoe UI" pitchFamily="34" charset="0"/>
-                <a:ea typeface="Segoe UI" pitchFamily="34" charset="-122"/>
-                <a:cs typeface="Segoe UI" pitchFamily="34" charset="-120"/>
-              </a:rPr>
-              <a:t>The UI caveat</a:t>
-            </a:r>
-            <a:endParaRPr lang="en-US" sz="3600" dirty="0"/>
-          </a:p>
-        </p:txBody>
-      </p:sp>
-      <p:sp>
-        <p:nvSpPr>
-          <p:cNvPr id="3" name="Shape 1"/>
-          <p:cNvSpPr/>
-          <p:nvPr/>
-        </p:nvSpPr>
-        <p:spPr>
-          <a:xfrm>
-            <a:off x="457200" y="1188720"/>
-            <a:ext cx="4114800" cy="54864"/>
-          </a:xfrm>
-          <a:prstGeom prst="rect">
-            <a:avLst/>
-          </a:prstGeom>
-          <a:solidFill>
-            <a:srgbClr val="00A1E0"/>
-          </a:solidFill>
-          <a:ln w="12700">
-            <a:solidFill>
-              <a:srgbClr val="00A1E0"/>
-            </a:solidFill>
-            <a:prstDash val="solid"/>
-          </a:ln>
-        </p:spPr>
-      </p:sp>
-      <p:sp>
-        <p:nvSpPr>
-          <p:cNvPr id="4" name="Shape 2"/>
-          <p:cNvSpPr/>
-          <p:nvPr/>
-        </p:nvSpPr>
-        <p:spPr>
-          <a:xfrm>
-            <a:off x="4572000" y="1188720"/>
-            <a:ext cx="4114800" cy="54864"/>
-          </a:xfrm>
-          <a:prstGeom prst="rect">
-            <a:avLst/>
-          </a:prstGeom>
-          <a:solidFill>
-            <a:srgbClr val="B455B6"/>
-          </a:solidFill>
-          <a:ln w="12700">
-            <a:solidFill>
-              <a:srgbClr val="B455B6"/>
-            </a:solidFill>
-            <a:prstDash val="solid"/>
-          </a:ln>
-        </p:spPr>
-      </p:sp>
-      <p:sp>
-        <p:nvSpPr>
-          <p:cNvPr id="5" name="Text 3"/>
-          <p:cNvSpPr/>
-          <p:nvPr/>
-        </p:nvSpPr>
-        <p:spPr>
-          <a:xfrm>
-            <a:off x="457200" y="1463040"/>
-            <a:ext cx="8229600" cy="2423160"/>
-          </a:xfrm>
-          <a:prstGeom prst="rect">
-            <a:avLst/>
-          </a:prstGeom>
-          <a:noFill/>
-          <a:ln/>
-        </p:spPr>
-        <p:txBody>
-          <a:bodyPr wrap="square" lIns="0" tIns="0" rIns="0" bIns="0" rtlCol="0" anchor="t"/>
-          <a:lstStyle/>
-          <a:p>
-            <a:pPr marL="342900" indent="-342900">
-              <a:lnSpc>
-                <a:spcPct val="120000"/>
-              </a:lnSpc>
-              <a:buSzPct val="100000"/>
-              <a:buChar char="•"/>
-            </a:pPr>
-            <a:r>
-              <a:rPr lang="en-US" sz="2000" dirty="0">
-                <a:solidFill>
-                  <a:srgbClr val="FFFFFF"/>
-                </a:solidFill>
-                <a:latin typeface="Segoe UI" pitchFamily="34" charset="0"/>
-                <a:ea typeface="Segoe UI" pitchFamily="34" charset="-122"/>
-                <a:cs typeface="Segoe UI" pitchFamily="34" charset="-120"/>
-              </a:rPr>
-              <a:t>Prefix lands in metrics and spans today — DQL, alerts, dashboards all see it</a:t>
-            </a:r>
-            <a:endParaRPr lang="en-US" sz="2000" dirty="0"/>
-          </a:p>
-          <a:p>
-            <a:pPr marL="342900" indent="-342900">
-              <a:lnSpc>
-                <a:spcPct val="120000"/>
-              </a:lnSpc>
-              <a:buSzPct val="100000"/>
-              <a:buChar char="•"/>
-            </a:pPr>
-            <a:r>
-              <a:rPr lang="en-US" sz="2000" dirty="0">
-                <a:solidFill>
-                  <a:srgbClr val="FFFFFF"/>
-                </a:solidFill>
-                <a:latin typeface="Segoe UI" pitchFamily="34" charset="0"/>
-                <a:ea typeface="Segoe UI" pitchFamily="34" charset="-122"/>
-                <a:cs typeface="Segoe UI" pitchFamily="34" charset="-120"/>
-              </a:rPr>
-              <a:t>entity.name in the Services app does not yet carry the prefix — list UI update is pending</a:t>
-            </a:r>
-            <a:endParaRPr lang="en-US" sz="2000" dirty="0"/>
-          </a:p>
-          <a:p>
-            <a:pPr marL="342900" indent="-342900">
-              <a:lnSpc>
-                <a:spcPct val="120000"/>
-              </a:lnSpc>
-              <a:buSzPct val="100000"/>
-              <a:buChar char="•"/>
-            </a:pPr>
-            <a:r>
-              <a:rPr lang="en-US" sz="2000" dirty="0">
-                <a:solidFill>
-                  <a:srgbClr val="FFFFFF"/>
-                </a:solidFill>
-                <a:latin typeface="Segoe UI" pitchFamily="34" charset="0"/>
-                <a:ea typeface="Segoe UI" pitchFamily="34" charset="-122"/>
-                <a:cs typeface="Segoe UI" pitchFamily="34" charset="-120"/>
-              </a:rPr>
-              <a:t>Classic's entity fragmentation also still there; service.name fixes *naming and queryability*, not entity consolidation (that's what SDv2 does)</a:t>
+              <a:t>Entity fragmentation is still there — this fixes naming and queryability, not consolidation; that's what SDv2 does</a:t>
             </a:r>
             <a:endParaRPr lang="en-US" sz="2000" dirty="0"/>
           </a:p>
@@ -4047,7 +4108,7 @@
                 <a:ea typeface="Segoe UI" pitchFamily="34" charset="-122"/>
                 <a:cs typeface="Segoe UI" pitchFamily="34" charset="-120"/>
               </a:rPr>
-              <a:t>See it live</a:t>
+              <a:t>The prefix has a UI gap today</a:t>
             </a:r>
             <a:endParaRPr lang="en-US" sz="3600" dirty="0"/>
           </a:p>
@@ -4112,87 +4173,6 @@
         <p:spPr>
           <a:xfrm>
             <a:off x="457200" y="1463040"/>
-            <a:ext cx="8229600" cy="484632"/>
-          </a:xfrm>
-          <a:prstGeom prst="rect">
-            <a:avLst/>
-          </a:prstGeom>
-          <a:noFill/>
-          <a:ln/>
-        </p:spPr>
-        <p:txBody>
-          <a:bodyPr wrap="square" lIns="0" tIns="0" rIns="0" bIns="0" rtlCol="0" anchor="t"/>
-          <a:lstStyle/>
-          <a:p>
-            <a:pPr indent="0" marL="0">
-              <a:buNone/>
-            </a:pPr>
-            <a:r>
-              <a:rPr lang="en-US" sz="2000" b="1" dirty="0">
-                <a:solidFill>
-                  <a:srgbClr val="00A1E0"/>
-                </a:solidFill>
-                <a:latin typeface="Segoe UI" pitchFamily="34" charset="0"/>
-                <a:ea typeface="Segoe UI" pitchFamily="34" charset="-122"/>
-                <a:cs typeface="Segoe UI" pitchFamily="34" charset="-120"/>
-              </a:rPr>
-              <a:t>Demo: SDv2 demo</a:t>
-            </a:r>
-            <a:pPr indent="0" marL="0">
-              <a:buNone/>
-            </a:pPr>
-            <a:r>
-              <a:rPr lang="en-US" sz="2000" dirty="0">
-                <a:solidFill>
-                  <a:srgbClr val="FFFFFF"/>
-                </a:solidFill>
-                <a:latin typeface="Segoe UI" pitchFamily="34" charset="0"/>
-                <a:ea typeface="Segoe UI" pitchFamily="34" charset="-122"/>
-                <a:cs typeface="Segoe UI" pitchFamily="34" charset="-120"/>
-              </a:rPr>
-              <a:t> (</a:t>
-            </a:r>
-            <a:pPr indent="0" marL="0">
-              <a:buNone/>
-            </a:pPr>
-            <a:r>
-              <a:rPr lang="en-US" sz="1800" dirty="0">
-                <a:solidFill>
-                  <a:srgbClr val="FFFFFF"/>
-                </a:solidFill>
-                <a:latin typeface="Consolas" pitchFamily="34" charset="0"/>
-                <a:ea typeface="Consolas" pitchFamily="34" charset="-122"/>
-                <a:cs typeface="Consolas" pitchFamily="34" charset="-120"/>
-              </a:rPr>
-              <a:t>sdv2-demo.yaml</a:t>
-            </a:r>
-            <a:pPr indent="0" marL="0">
-              <a:buNone/>
-            </a:pPr>
-            <a:r>
-              <a:rPr lang="en-US" sz="2000" dirty="0">
-                <a:solidFill>
-                  <a:srgbClr val="FFFFFF"/>
-                </a:solidFill>
-                <a:latin typeface="Segoe UI" pitchFamily="34" charset="0"/>
-                <a:ea typeface="Segoe UI" pitchFamily="34" charset="-122"/>
-                <a:cs typeface="Segoe UI" pitchFamily="34" charset="-120"/>
-              </a:rPr>
-              <a:t>) — Questions 1-4</a:t>
-            </a:r>
-            <a:endParaRPr lang="en-US" sz="2000" dirty="0"/>
-          </a:p>
-        </p:txBody>
-      </p:sp>
-      <p:sp>
-        <p:nvSpPr>
-          <p:cNvPr id="6" name="Text 4"/>
-          <p:cNvSpPr/>
-          <p:nvPr/>
-        </p:nvSpPr>
-        <p:spPr>
-          <a:xfrm>
-            <a:off x="457200" y="2130552"/>
             <a:ext cx="8229600" cy="2057400"/>
           </a:xfrm>
           <a:prstGeom prst="rect">
@@ -4221,7 +4201,7 @@
                 <a:ea typeface="Segoe UI" pitchFamily="34" charset="-122"/>
                 <a:cs typeface="Segoe UI" pitchFamily="34" charset="-120"/>
               </a:rPr>
-              <a:t>Count distinct dt.service.name per workload</a:t>
+              <a:t>Lands in metrics and spans today — DQL, alerts, dashboards see the prefix</a:t>
             </a:r>
             <a:endParaRPr lang="en-US" sz="2000" dirty="0"/>
           </a:p>
@@ -4242,7 +4222,7 @@
                 <a:ea typeface="Segoe UI" pitchFamily="34" charset="-122"/>
                 <a:cs typeface="Segoe UI" pitchFamily="34" charset="-120"/>
               </a:rPr>
-              <a:t>Check serviceType: WEB_REQUEST_SERVICE vs UNIFIED</a:t>
+              <a:t>entity.name in the Services app does not yet carry the prefix — list-view UI update is pending</a:t>
             </a:r>
             <a:endParaRPr lang="en-US" sz="2000" dirty="0"/>
           </a:p>
@@ -4263,28 +4243,7 @@
                 <a:ea typeface="Segoe UI" pitchFamily="34" charset="-122"/>
                 <a:cs typeface="Segoe UI" pitchFamily="34" charset="-120"/>
               </a:rPr>
-              <a:t>Compare orders-demo and orders-demo-named — same fragmentation, prefixed on the named side</a:t>
-            </a:r>
-            <a:endParaRPr lang="en-US" sz="2000" dirty="0"/>
-          </a:p>
-          <a:p>
-            <a:pPr marL="342900" indent="-342900">
-              <a:lnSpc>
-                <a:spcPct val="120000"/>
-              </a:lnSpc>
-              <a:buSzPct val="100000"/>
-              <a:buChar char="•"/>
-            </a:pPr>
-            <a:r>
-              <a:rPr lang="en-US" sz="2000" dirty="0">
-                <a:solidFill>
-                  <a:srgbClr val="FFFFFF"/>
-                </a:solidFill>
-                <a:latin typeface="Segoe UI" pitchFamily="34" charset="0"/>
-                <a:ea typeface="Segoe UI" pitchFamily="34" charset="-122"/>
-                <a:cs typeface="Segoe UI" pitchFamily="34" charset="-120"/>
-              </a:rPr>
-              <a:t>Split request throughput by dt.service.name — SDv1 many lines, SDv2 one</a:t>
+              <a:t>Under SDv2 the same service.name env var just becomes the outright name — no prefix because nothing to prefix</a:t>
             </a:r>
             <a:endParaRPr lang="en-US" sz="2000" dirty="0"/>
           </a:p>
@@ -4323,8 +4282,8 @@
         </p:nvSpPr>
         <p:spPr>
           <a:xfrm>
-            <a:off x="457200" y="2011680"/>
-            <a:ext cx="8229600" cy="914400"/>
+            <a:off x="457200" y="457200"/>
+            <a:ext cx="8229600" cy="640080"/>
           </a:xfrm>
           <a:prstGeom prst="rect">
             <a:avLst/>
@@ -4336,11 +4295,11 @@
           <a:bodyPr wrap="square" rtlCol="0" anchor="ctr"/>
           <a:lstStyle/>
           <a:p>
-            <a:pPr algn="ctr" indent="0" marL="0">
+            <a:pPr indent="0" marL="0">
               <a:buNone/>
             </a:pPr>
             <a:r>
-              <a:rPr lang="en-US" sz="4000" b="1" dirty="0">
+              <a:rPr lang="en-US" sz="3600" b="1" dirty="0">
                 <a:solidFill>
                   <a:srgbClr val="FFFFFF"/>
                 </a:solidFill>
@@ -4348,9 +4307,9 @@
                 <a:ea typeface="Segoe UI" pitchFamily="34" charset="-122"/>
                 <a:cs typeface="Segoe UI" pitchFamily="34" charset="-120"/>
               </a:rPr>
-              <a:t>Dimensions do the slicing</a:t>
-            </a:r>
-            <a:endParaRPr lang="en-US" sz="4000" dirty="0"/>
+              <a:t>See it live</a:t>
+            </a:r>
+            <a:endParaRPr lang="en-US" sz="3600" dirty="0"/>
           </a:p>
         </p:txBody>
       </p:sp>
@@ -4362,8 +4321,8 @@
         </p:nvSpPr>
         <p:spPr>
           <a:xfrm>
-            <a:off x="1828800" y="3017520"/>
-            <a:ext cx="5486400" cy="54864"/>
+            <a:off x="457200" y="1188720"/>
+            <a:ext cx="4114800" cy="54864"/>
           </a:xfrm>
           <a:prstGeom prst="rect">
             <a:avLst/>
@@ -4371,19 +4330,49 @@
           <a:solidFill>
             <a:srgbClr val="00A1E0"/>
           </a:solidFill>
-          <a:ln/>
+          <a:ln w="12700">
+            <a:solidFill>
+              <a:srgbClr val="00A1E0"/>
+            </a:solidFill>
+            <a:prstDash val="solid"/>
+          </a:ln>
         </p:spPr>
       </p:sp>
       <p:sp>
         <p:nvSpPr>
-          <p:cNvPr id="4" name="Text 2"/>
+          <p:cNvPr id="4" name="Shape 2"/>
           <p:cNvSpPr/>
           <p:nvPr/>
         </p:nvSpPr>
         <p:spPr>
           <a:xfrm>
-            <a:off x="457200" y="3291840"/>
-            <a:ext cx="8229600" cy="548640"/>
+            <a:off x="4572000" y="1188720"/>
+            <a:ext cx="4114800" cy="54864"/>
+          </a:xfrm>
+          <a:prstGeom prst="rect">
+            <a:avLst/>
+          </a:prstGeom>
+          <a:solidFill>
+            <a:srgbClr val="B455B6"/>
+          </a:solidFill>
+          <a:ln w="12700">
+            <a:solidFill>
+              <a:srgbClr val="B455B6"/>
+            </a:solidFill>
+            <a:prstDash val="solid"/>
+          </a:ln>
+        </p:spPr>
+      </p:sp>
+      <p:sp>
+        <p:nvSpPr>
+          <p:cNvPr id="5" name="Text 3"/>
+          <p:cNvSpPr/>
+          <p:nvPr/>
+        </p:nvSpPr>
+        <p:spPr>
+          <a:xfrm>
+            <a:off x="457200" y="1463040"/>
+            <a:ext cx="8229600" cy="484632"/>
           </a:xfrm>
           <a:prstGeom prst="rect">
             <a:avLst/>
@@ -4392,10 +4381,10 @@
           <a:ln/>
         </p:spPr>
         <p:txBody>
-          <a:bodyPr wrap="square" rtlCol="0" anchor="ctr"/>
+          <a:bodyPr wrap="square" lIns="0" tIns="0" rIns="0" bIns="0" rtlCol="0" anchor="t"/>
           <a:lstStyle/>
           <a:p>
-            <a:pPr algn="ctr" indent="0" marL="0">
+            <a:pPr indent="0" marL="0">
               <a:buNone/>
             </a:pPr>
             <a:r>
@@ -4407,7 +4396,212 @@
                 <a:ea typeface="Segoe UI" pitchFamily="34" charset="-122"/>
                 <a:cs typeface="Segoe UI" pitchFamily="34" charset="-120"/>
               </a:rPr>
-              <a:t>The per-endpoint, per-queue, per-database detail you used to navigate by clicking between entities lives on dimensions now</a:t>
+              <a:t>Demo: SDv2 demo</a:t>
+            </a:r>
+            <a:pPr indent="0" marL="0">
+              <a:buNone/>
+            </a:pPr>
+            <a:r>
+              <a:rPr lang="en-US" sz="2000" dirty="0">
+                <a:solidFill>
+                  <a:srgbClr val="FFFFFF"/>
+                </a:solidFill>
+                <a:latin typeface="Segoe UI" pitchFamily="34" charset="0"/>
+                <a:ea typeface="Segoe UI" pitchFamily="34" charset="-122"/>
+                <a:cs typeface="Segoe UI" pitchFamily="34" charset="-120"/>
+              </a:rPr>
+              <a:t> (</a:t>
+            </a:r>
+            <a:pPr indent="0" marL="0">
+              <a:buNone/>
+            </a:pPr>
+            <a:r>
+              <a:rPr lang="en-US" sz="1800" dirty="0">
+                <a:solidFill>
+                  <a:srgbClr val="FFFFFF"/>
+                </a:solidFill>
+                <a:latin typeface="Consolas" pitchFamily="34" charset="0"/>
+                <a:ea typeface="Consolas" pitchFamily="34" charset="-122"/>
+                <a:cs typeface="Consolas" pitchFamily="34" charset="-120"/>
+              </a:rPr>
+              <a:t>sdv2-demo.yaml</a:t>
+            </a:r>
+            <a:pPr indent="0" marL="0">
+              <a:buNone/>
+            </a:pPr>
+            <a:r>
+              <a:rPr lang="en-US" sz="2000" dirty="0">
+                <a:solidFill>
+                  <a:srgbClr val="FFFFFF"/>
+                </a:solidFill>
+                <a:latin typeface="Segoe UI" pitchFamily="34" charset="0"/>
+                <a:ea typeface="Segoe UI" pitchFamily="34" charset="-122"/>
+                <a:cs typeface="Segoe UI" pitchFamily="34" charset="-120"/>
+              </a:rPr>
+              <a:t>) — Questions 1-4</a:t>
+            </a:r>
+            <a:endParaRPr lang="en-US" sz="2000" dirty="0"/>
+          </a:p>
+        </p:txBody>
+      </p:sp>
+      <p:sp>
+        <p:nvSpPr>
+          <p:cNvPr id="6" name="Text 4"/>
+          <p:cNvSpPr/>
+          <p:nvPr/>
+        </p:nvSpPr>
+        <p:spPr>
+          <a:xfrm>
+            <a:off x="457200" y="2130552"/>
+            <a:ext cx="8229600" cy="484632"/>
+          </a:xfrm>
+          <a:prstGeom prst="rect">
+            <a:avLst/>
+          </a:prstGeom>
+          <a:noFill/>
+          <a:ln/>
+        </p:spPr>
+        <p:txBody>
+          <a:bodyPr wrap="square" lIns="0" tIns="0" rIns="0" bIns="0" rtlCol="0" anchor="t"/>
+          <a:lstStyle/>
+          <a:p>
+            <a:pPr indent="0" marL="0">
+              <a:buNone/>
+            </a:pPr>
+            <a:r>
+              <a:rPr lang="en-US" sz="2000" dirty="0">
+                <a:solidFill>
+                  <a:srgbClr val="FFFFFF"/>
+                </a:solidFill>
+                <a:latin typeface="Segoe UI" pitchFamily="34" charset="0"/>
+                <a:ea typeface="Segoe UI" pitchFamily="34" charset="-122"/>
+                <a:cs typeface="Segoe UI" pitchFamily="34" charset="-120"/>
+              </a:rPr>
+              <a:t>Core story (SDv2 collapse):</a:t>
+            </a:r>
+            <a:endParaRPr lang="en-US" sz="2000" dirty="0"/>
+          </a:p>
+        </p:txBody>
+      </p:sp>
+      <p:sp>
+        <p:nvSpPr>
+          <p:cNvPr id="7" name="Text 5"/>
+          <p:cNvSpPr/>
+          <p:nvPr/>
+        </p:nvSpPr>
+        <p:spPr>
+          <a:xfrm>
+            <a:off x="457200" y="2798064"/>
+            <a:ext cx="8229600" cy="1325880"/>
+          </a:xfrm>
+          <a:prstGeom prst="rect">
+            <a:avLst/>
+          </a:prstGeom>
+          <a:noFill/>
+          <a:ln/>
+        </p:spPr>
+        <p:txBody>
+          <a:bodyPr wrap="square" lIns="0" tIns="0" rIns="0" bIns="0" rtlCol="0" anchor="t"/>
+          <a:lstStyle/>
+          <a:p>
+            <a:pPr marL="342900" indent="-342900">
+              <a:lnSpc>
+                <a:spcPct val="120000"/>
+              </a:lnSpc>
+              <a:buSzPct val="100000"/>
+              <a:buChar char="•"/>
+            </a:pPr>
+            <a:r>
+              <a:rPr lang="en-US" sz="2000" dirty="0">
+                <a:solidFill>
+                  <a:srgbClr val="FFFFFF"/>
+                </a:solidFill>
+                <a:latin typeface="Segoe UI" pitchFamily="34" charset="0"/>
+                <a:ea typeface="Segoe UI" pitchFamily="34" charset="-122"/>
+                <a:cs typeface="Segoe UI" pitchFamily="34" charset="-120"/>
+              </a:rPr>
+              <a:t>Count distinct dt.service.name per workload — SDv1 four, SDv2 one</a:t>
+            </a:r>
+            <a:endParaRPr lang="en-US" sz="2000" dirty="0"/>
+          </a:p>
+          <a:p>
+            <a:pPr marL="342900" indent="-342900">
+              <a:lnSpc>
+                <a:spcPct val="120000"/>
+              </a:lnSpc>
+              <a:buSzPct val="100000"/>
+              <a:buChar char="•"/>
+            </a:pPr>
+            <a:r>
+              <a:rPr lang="en-US" sz="2000" dirty="0">
+                <a:solidFill>
+                  <a:srgbClr val="FFFFFF"/>
+                </a:solidFill>
+                <a:latin typeface="Segoe UI" pitchFamily="34" charset="0"/>
+                <a:ea typeface="Segoe UI" pitchFamily="34" charset="-122"/>
+                <a:cs typeface="Segoe UI" pitchFamily="34" charset="-120"/>
+              </a:rPr>
+              <a:t>Check serviceType: WEB_REQUEST_SERVICE vs UNIFIED</a:t>
+            </a:r>
+            <a:endParaRPr lang="en-US" sz="2000" dirty="0"/>
+          </a:p>
+          <a:p>
+            <a:pPr marL="342900" indent="-342900">
+              <a:lnSpc>
+                <a:spcPct val="120000"/>
+              </a:lnSpc>
+              <a:buSzPct val="100000"/>
+              <a:buChar char="•"/>
+            </a:pPr>
+            <a:r>
+              <a:rPr lang="en-US" sz="2000" dirty="0">
+                <a:solidFill>
+                  <a:srgbClr val="FFFFFF"/>
+                </a:solidFill>
+                <a:latin typeface="Segoe UI" pitchFamily="34" charset="0"/>
+                <a:ea typeface="Segoe UI" pitchFamily="34" charset="-122"/>
+                <a:cs typeface="Segoe UI" pitchFamily="34" charset="-120"/>
+              </a:rPr>
+              <a:t>Split request throughput by dt.service.name — SDv1 many lines, SDv2 one</a:t>
+            </a:r>
+            <a:endParaRPr lang="en-US" sz="2000" dirty="0"/>
+          </a:p>
+        </p:txBody>
+      </p:sp>
+      <p:sp>
+        <p:nvSpPr>
+          <p:cNvPr id="8" name="Text 6"/>
+          <p:cNvSpPr/>
+          <p:nvPr/>
+        </p:nvSpPr>
+        <p:spPr>
+          <a:xfrm>
+            <a:off x="457200" y="4261104"/>
+            <a:ext cx="8229600" cy="484632"/>
+          </a:xfrm>
+          <a:prstGeom prst="rect">
+            <a:avLst/>
+          </a:prstGeom>
+          <a:noFill/>
+          <a:ln/>
+        </p:spPr>
+        <p:txBody>
+          <a:bodyPr wrap="square" lIns="0" tIns="0" rIns="0" bIns="0" rtlCol="0" anchor="t"/>
+          <a:lstStyle/>
+          <a:p>
+            <a:pPr indent="0" marL="0">
+              <a:buNone/>
+            </a:pPr>
+            <a:r>
+              <a:rPr lang="en-US" sz="2000" dirty="0">
+                <a:solidFill>
+                  <a:srgbClr val="FFFFFF"/>
+                </a:solidFill>
+                <a:latin typeface="Segoe UI" pitchFamily="34" charset="0"/>
+                <a:ea typeface="Segoe UI" pitchFamily="34" charset="-122"/>
+                <a:cs typeface="Segoe UI" pitchFamily="34" charset="-120"/>
+              </a:rPr>
+              <a:t>Detour (SDv1 naming-rules bridge):</a:t>
             </a:r>
             <a:endParaRPr lang="en-US" sz="2000" dirty="0"/>
           </a:p>
@@ -4446,6 +4640,129 @@
         </p:nvSpPr>
         <p:spPr>
           <a:xfrm>
+            <a:off x="457200" y="2011680"/>
+            <a:ext cx="8229600" cy="914400"/>
+          </a:xfrm>
+          <a:prstGeom prst="rect">
+            <a:avLst/>
+          </a:prstGeom>
+          <a:noFill/>
+          <a:ln/>
+        </p:spPr>
+        <p:txBody>
+          <a:bodyPr wrap="square" rtlCol="0" anchor="ctr"/>
+          <a:lstStyle/>
+          <a:p>
+            <a:pPr algn="ctr" indent="0" marL="0">
+              <a:buNone/>
+            </a:pPr>
+            <a:r>
+              <a:rPr lang="en-US" sz="4000" b="1" dirty="0">
+                <a:solidFill>
+                  <a:srgbClr val="FFFFFF"/>
+                </a:solidFill>
+                <a:latin typeface="Segoe UI" pitchFamily="34" charset="0"/>
+                <a:ea typeface="Segoe UI" pitchFamily="34" charset="-122"/>
+                <a:cs typeface="Segoe UI" pitchFamily="34" charset="-120"/>
+              </a:rPr>
+              <a:t>Dimensions do the slicing</a:t>
+            </a:r>
+            <a:endParaRPr lang="en-US" sz="4000" dirty="0"/>
+          </a:p>
+        </p:txBody>
+      </p:sp>
+      <p:sp>
+        <p:nvSpPr>
+          <p:cNvPr id="3" name="Shape 1"/>
+          <p:cNvSpPr/>
+          <p:nvPr/>
+        </p:nvSpPr>
+        <p:spPr>
+          <a:xfrm>
+            <a:off x="1828800" y="3017520"/>
+            <a:ext cx="5486400" cy="54864"/>
+          </a:xfrm>
+          <a:prstGeom prst="rect">
+            <a:avLst/>
+          </a:prstGeom>
+          <a:solidFill>
+            <a:srgbClr val="00A1E0"/>
+          </a:solidFill>
+          <a:ln/>
+        </p:spPr>
+      </p:sp>
+      <p:sp>
+        <p:nvSpPr>
+          <p:cNvPr id="4" name="Text 2"/>
+          <p:cNvSpPr/>
+          <p:nvPr/>
+        </p:nvSpPr>
+        <p:spPr>
+          <a:xfrm>
+            <a:off x="457200" y="3291840"/>
+            <a:ext cx="8229600" cy="548640"/>
+          </a:xfrm>
+          <a:prstGeom prst="rect">
+            <a:avLst/>
+          </a:prstGeom>
+          <a:noFill/>
+          <a:ln/>
+        </p:spPr>
+        <p:txBody>
+          <a:bodyPr wrap="square" rtlCol="0" anchor="ctr"/>
+          <a:lstStyle/>
+          <a:p>
+            <a:pPr algn="ctr" indent="0" marL="0">
+              <a:buNone/>
+            </a:pPr>
+            <a:r>
+              <a:rPr lang="en-US" sz="2000" b="1" dirty="0">
+                <a:solidFill>
+                  <a:srgbClr val="00A1E0"/>
+                </a:solidFill>
+                <a:latin typeface="Segoe UI" pitchFamily="34" charset="0"/>
+                <a:ea typeface="Segoe UI" pitchFamily="34" charset="-122"/>
+                <a:cs typeface="Segoe UI" pitchFamily="34" charset="-120"/>
+              </a:rPr>
+              <a:t>The per-endpoint, per-queue, per-database detail you used to navigate by clicking between entities lives on dimensions now</a:t>
+            </a:r>
+            <a:endParaRPr lang="en-US" sz="2000" dirty="0"/>
+          </a:p>
+        </p:txBody>
+      </p:sp>
+    </p:spTree>
+  </p:cSld>
+  <p:clrMapOvr>
+    <a:masterClrMapping/>
+  </p:clrMapOvr>
+</p:sld>
+</file>
+
+<file path=ppt/slides/slide15.xml><?xml version="1.0" encoding="utf-8"?>
+<p:sld xmlns:a="http://schemas.openxmlformats.org/drawingml/2006/main" xmlns:r="http://schemas.openxmlformats.org/officeDocument/2006/relationships" xmlns:p="http://schemas.openxmlformats.org/presentationml/2006/main">
+  <p:cSld name="Slide 15">
+    <p:spTree>
+      <p:nvGrpSpPr>
+        <p:cNvPr id="1" name=""/>
+        <p:cNvGrpSpPr/>
+        <p:nvPr/>
+      </p:nvGrpSpPr>
+      <p:grpSpPr>
+        <a:xfrm>
+          <a:off x="0" y="0"/>
+          <a:ext cx="0" cy="0"/>
+          <a:chOff x="0" y="0"/>
+          <a:chExt cx="0" cy="0"/>
+        </a:xfrm>
+      </p:grpSpPr>
+      <p:sp>
+        <p:nvSpPr>
+          <p:cNvPr id="2" name="Text 0"/>
+          <p:cNvSpPr/>
+          <p:nvPr/>
+        </p:nvSpPr>
+        <p:spPr>
+          <a:xfrm>
             <a:off x="457200" y="457200"/>
             <a:ext cx="8229600" cy="640080"/>
           </a:xfrm>
@@ -4529,7 +4846,7 @@
       </p:sp>
       <p:graphicFrame>
         <p:nvGraphicFramePr>
-          <p:cNvPr id="15" name="Table 0"/>
+          <p:cNvPr id="16" name="Table 0"/>
           <p:cNvGraphicFramePr>
             <a:graphicFrameLocks noGrp="1"/>
           </p:cNvGraphicFramePr>
@@ -5457,9 +5774,9 @@
 </p:sld>
 </file>
 
-<file path=ppt/slides/slide15.xml><?xml version="1.0" encoding="utf-8"?>
+<file path=ppt/slides/slide16.xml><?xml version="1.0" encoding="utf-8"?>
 <p:sld xmlns:a="http://schemas.openxmlformats.org/drawingml/2006/main" xmlns:r="http://schemas.openxmlformats.org/officeDocument/2006/relationships" xmlns:p="http://schemas.openxmlformats.org/presentationml/2006/main">
-  <p:cSld name="Slide 15">
+  <p:cSld name="Slide 16">
     <p:spTree>
       <p:nvGrpSpPr>
         <p:cNvPr id="1" name=""/>
@@ -5716,9 +6033,9 @@
 </p:sld>
 </file>
 
-<file path=ppt/slides/slide16.xml><?xml version="1.0" encoding="utf-8"?>
+<file path=ppt/slides/slide17.xml><?xml version="1.0" encoding="utf-8"?>
 <p:sld xmlns:a="http://schemas.openxmlformats.org/drawingml/2006/main" xmlns:r="http://schemas.openxmlformats.org/officeDocument/2006/relationships" xmlns:p="http://schemas.openxmlformats.org/presentationml/2006/main">
-  <p:cSld name="Slide 16">
+  <p:cSld name="Slide 17">
     <p:spTree>
       <p:nvGrpSpPr>
         <p:cNvPr id="1" name=""/>
@@ -5824,7 +6141,7 @@
       </p:sp>
       <p:graphicFrame>
         <p:nvGraphicFramePr>
-          <p:cNvPr id="17" name="Table 0"/>
+          <p:cNvPr id="18" name="Table 0"/>
           <p:cNvGraphicFramePr>
             <a:graphicFrameLocks noGrp="1"/>
           </p:cNvGraphicFramePr>
@@ -6738,9 +7055,9 @@
 </p:sld>
 </file>
 
-<file path=ppt/slides/slide17.xml><?xml version="1.0" encoding="utf-8"?>
+<file path=ppt/slides/slide18.xml><?xml version="1.0" encoding="utf-8"?>
 <p:sld xmlns:a="http://schemas.openxmlformats.org/drawingml/2006/main" xmlns:r="http://schemas.openxmlformats.org/officeDocument/2006/relationships" xmlns:p="http://schemas.openxmlformats.org/presentationml/2006/main">
-  <p:cSld name="Slide 17">
+  <p:cSld name="Slide 18">
     <p:spTree>
       <p:nvGrpSpPr>
         <p:cNvPr id="1" name=""/>
@@ -6913,7 +7230,7 @@
       </p:sp>
       <p:graphicFrame>
         <p:nvGraphicFramePr>
-          <p:cNvPr id="18" name="Table 0"/>
+          <p:cNvPr id="19" name="Table 0"/>
           <p:cNvGraphicFramePr>
             <a:graphicFrameLocks noGrp="1"/>
           </p:cNvGraphicFramePr>
@@ -7568,9 +7885,9 @@
 </p:sld>
 </file>
 
-<file path=ppt/slides/slide18.xml><?xml version="1.0" encoding="utf-8"?>
+<file path=ppt/slides/slide19.xml><?xml version="1.0" encoding="utf-8"?>
 <p:sld xmlns:a="http://schemas.openxmlformats.org/drawingml/2006/main" xmlns:r="http://schemas.openxmlformats.org/officeDocument/2006/relationships" xmlns:p="http://schemas.openxmlformats.org/presentationml/2006/main">
-  <p:cSld name="Slide 18">
+  <p:cSld name="Slide 19">
     <p:spTree>
       <p:nvGrpSpPr>
         <p:cNvPr id="1" name=""/>
@@ -7909,325 +8226,6 @@
                 <a:cs typeface="Segoe UI" pitchFamily="34" charset="-120"/>
               </a:rPr>
               <a:t> by truncating at the first volatile segment (IDs, hashes, UUIDs). Classic-first rollout; SDv2 opt-in then default.</a:t>
-            </a:r>
-            <a:endParaRPr lang="en-US" sz="2000" dirty="0"/>
-          </a:p>
-        </p:txBody>
-      </p:sp>
-    </p:spTree>
-  </p:cSld>
-  <p:clrMapOvr>
-    <a:masterClrMapping/>
-  </p:clrMapOvr>
-</p:sld>
-</file>
-
-<file path=ppt/slides/slide19.xml><?xml version="1.0" encoding="utf-8"?>
-<p:sld xmlns:a="http://schemas.openxmlformats.org/drawingml/2006/main" xmlns:r="http://schemas.openxmlformats.org/officeDocument/2006/relationships" xmlns:p="http://schemas.openxmlformats.org/presentationml/2006/main">
-  <p:cSld name="Slide 19">
-    <p:spTree>
-      <p:nvGrpSpPr>
-        <p:cNvPr id="1" name=""/>
-        <p:cNvGrpSpPr/>
-        <p:nvPr/>
-      </p:nvGrpSpPr>
-      <p:grpSpPr>
-        <a:xfrm>
-          <a:off x="0" y="0"/>
-          <a:ext cx="0" cy="0"/>
-          <a:chOff x="0" y="0"/>
-          <a:chExt cx="0" cy="0"/>
-        </a:xfrm>
-      </p:grpSpPr>
-      <p:sp>
-        <p:nvSpPr>
-          <p:cNvPr id="2" name="Text 0"/>
-          <p:cNvSpPr/>
-          <p:nvPr/>
-        </p:nvSpPr>
-        <p:spPr>
-          <a:xfrm>
-            <a:off x="457200" y="457200"/>
-            <a:ext cx="8229600" cy="640080"/>
-          </a:xfrm>
-          <a:prstGeom prst="rect">
-            <a:avLst/>
-          </a:prstGeom>
-          <a:noFill/>
-          <a:ln/>
-        </p:spPr>
-        <p:txBody>
-          <a:bodyPr wrap="square" rtlCol="0" anchor="ctr"/>
-          <a:lstStyle/>
-          <a:p>
-            <a:pPr indent="0" marL="0">
-              <a:buNone/>
-            </a:pPr>
-            <a:r>
-              <a:rPr lang="en-US" sz="3600" b="1" dirty="0">
-                <a:solidFill>
-                  <a:srgbClr val="FFFFFF"/>
-                </a:solidFill>
-                <a:latin typeface="Segoe UI" pitchFamily="34" charset="0"/>
-                <a:ea typeface="Segoe UI" pitchFamily="34" charset="-122"/>
-                <a:cs typeface="Segoe UI" pitchFamily="34" charset="-120"/>
-              </a:rPr>
-              <a:t>Metric-first DQL</a:t>
-            </a:r>
-            <a:endParaRPr lang="en-US" sz="3600" dirty="0"/>
-          </a:p>
-        </p:txBody>
-      </p:sp>
-      <p:sp>
-        <p:nvSpPr>
-          <p:cNvPr id="3" name="Shape 1"/>
-          <p:cNvSpPr/>
-          <p:nvPr/>
-        </p:nvSpPr>
-        <p:spPr>
-          <a:xfrm>
-            <a:off x="457200" y="1188720"/>
-            <a:ext cx="4114800" cy="54864"/>
-          </a:xfrm>
-          <a:prstGeom prst="rect">
-            <a:avLst/>
-          </a:prstGeom>
-          <a:solidFill>
-            <a:srgbClr val="00A1E0"/>
-          </a:solidFill>
-          <a:ln w="12700">
-            <a:solidFill>
-              <a:srgbClr val="00A1E0"/>
-            </a:solidFill>
-            <a:prstDash val="solid"/>
-          </a:ln>
-        </p:spPr>
-      </p:sp>
-      <p:sp>
-        <p:nvSpPr>
-          <p:cNvPr id="4" name="Shape 2"/>
-          <p:cNvSpPr/>
-          <p:nvPr/>
-        </p:nvSpPr>
-        <p:spPr>
-          <a:xfrm>
-            <a:off x="4572000" y="1188720"/>
-            <a:ext cx="4114800" cy="54864"/>
-          </a:xfrm>
-          <a:prstGeom prst="rect">
-            <a:avLst/>
-          </a:prstGeom>
-          <a:solidFill>
-            <a:srgbClr val="B455B6"/>
-          </a:solidFill>
-          <a:ln w="12700">
-            <a:solidFill>
-              <a:srgbClr val="B455B6"/>
-            </a:solidFill>
-            <a:prstDash val="solid"/>
-          </a:ln>
-        </p:spPr>
-      </p:sp>
-      <p:sp>
-        <p:nvSpPr>
-          <p:cNvPr id="5" name="Text 3"/>
-          <p:cNvSpPr/>
-          <p:nvPr/>
-        </p:nvSpPr>
-        <p:spPr>
-          <a:xfrm>
-            <a:off x="457200" y="1463040"/>
-            <a:ext cx="8229600" cy="2240280"/>
-          </a:xfrm>
-          <a:prstGeom prst="rect">
-            <a:avLst/>
-          </a:prstGeom>
-          <a:solidFill>
-            <a:srgbClr val="1A1A2E"/>
-          </a:solidFill>
-          <a:ln/>
-        </p:spPr>
-        <p:txBody>
-          <a:bodyPr wrap="square" rtlCol="0" anchor="t"/>
-          <a:lstStyle/>
-          <a:p>
-            <a:pPr indent="0" marL="0">
-              <a:buNone/>
-            </a:pPr>
-            <a:r>
-              <a:rPr lang="en-US" sz="1100" dirty="0">
-                <a:solidFill>
-                  <a:srgbClr val="FFFFFF"/>
-                </a:solidFill>
-                <a:latin typeface="Consolas" pitchFamily="34" charset="0"/>
-                <a:ea typeface="Consolas" pitchFamily="34" charset="-122"/>
-                <a:cs typeface="Consolas" pitchFamily="34" charset="-120"/>
-              </a:rPr>
-              <a:t>// Classic shape</a:t>
-            </a:r>
-            <a:endParaRPr lang="en-US" sz="1100" dirty="0"/>
-          </a:p>
-          <a:p>
-            <a:pPr indent="0" marL="0">
-              <a:buNone/>
-            </a:pPr>
-            <a:r>
-              <a:rPr lang="en-US" sz="1100" dirty="0">
-                <a:solidFill>
-                  <a:srgbClr val="FFFFFF"/>
-                </a:solidFill>
-                <a:latin typeface="Consolas" pitchFamily="34" charset="0"/>
-                <a:ea typeface="Consolas" pitchFamily="34" charset="-122"/>
-                <a:cs typeface="Consolas" pitchFamily="34" charset="-120"/>
-              </a:rPr>
-              <a:t>fetch dt.entity.service</a:t>
-            </a:r>
-            <a:endParaRPr lang="en-US" sz="1100" dirty="0"/>
-          </a:p>
-          <a:p>
-            <a:pPr indent="0" marL="0">
-              <a:buNone/>
-            </a:pPr>
-            <a:r>
-              <a:rPr lang="en-US" sz="1100" dirty="0">
-                <a:solidFill>
-                  <a:srgbClr val="FFFFFF"/>
-                </a:solidFill>
-                <a:latin typeface="Consolas" pitchFamily="34" charset="0"/>
-                <a:ea typeface="Consolas" pitchFamily="34" charset="-122"/>
-                <a:cs typeface="Consolas" pitchFamily="34" charset="-120"/>
-              </a:rPr>
-              <a:t>| filter entity.name == "orders-sdv2 -- orders-demo"</a:t>
-            </a:r>
-            <a:endParaRPr lang="en-US" sz="1100" dirty="0"/>
-          </a:p>
-          <a:p>
-            <a:pPr indent="0" marL="0">
-              <a:buNone/>
-            </a:pPr>
-            <a:r>
-              <a:rPr lang="en-US" sz="1100" dirty="0">
-                <a:solidFill>
-                  <a:srgbClr val="FFFFFF"/>
-                </a:solidFill>
-                <a:latin typeface="Consolas" pitchFamily="34" charset="0"/>
-                <a:ea typeface="Consolas" pitchFamily="34" charset="-122"/>
-                <a:cs typeface="Consolas" pitchFamily="34" charset="-120"/>
-              </a:rPr>
-              <a:t>| lookup [timeseries count = sum(dt.service.request.count), by: {dt.entity.service}],</a:t>
-            </a:r>
-            <a:endParaRPr lang="en-US" sz="1100" dirty="0"/>
-          </a:p>
-          <a:p>
-            <a:pPr indent="0" marL="0">
-              <a:buNone/>
-            </a:pPr>
-            <a:r>
-              <a:rPr lang="en-US" sz="1100" dirty="0">
-                <a:solidFill>
-                  <a:srgbClr val="FFFFFF"/>
-                </a:solidFill>
-                <a:latin typeface="Consolas" pitchFamily="34" charset="0"/>
-                <a:ea typeface="Consolas" pitchFamily="34" charset="-122"/>
-                <a:cs typeface="Consolas" pitchFamily="34" charset="-120"/>
-              </a:rPr>
-              <a:t>    sourceField: id, lookupField: dt.entity.service</a:t>
-            </a:r>
-            <a:endParaRPr lang="en-US" sz="1100" dirty="0"/>
-          </a:p>
-          <a:p>
-            <a:pPr indent="0" marL="0">
-              <a:buNone/>
-            </a:pPr>
-            <a:endParaRPr lang="en-US" sz="1100" dirty="0"/>
-          </a:p>
-          <a:p>
-            <a:pPr indent="0" marL="0">
-              <a:buNone/>
-            </a:pPr>
-            <a:r>
-              <a:rPr lang="en-US" sz="1100" dirty="0">
-                <a:solidFill>
-                  <a:srgbClr val="FFFFFF"/>
-                </a:solidFill>
-                <a:latin typeface="Consolas" pitchFamily="34" charset="0"/>
-                <a:ea typeface="Consolas" pitchFamily="34" charset="-122"/>
-                <a:cs typeface="Consolas" pitchFamily="34" charset="-120"/>
-              </a:rPr>
-              <a:t>// Latest shape</a:t>
-            </a:r>
-            <a:endParaRPr lang="en-US" sz="1100" dirty="0"/>
-          </a:p>
-          <a:p>
-            <a:pPr indent="0" marL="0">
-              <a:buNone/>
-            </a:pPr>
-            <a:r>
-              <a:rPr lang="en-US" sz="1100" dirty="0">
-                <a:solidFill>
-                  <a:srgbClr val="FFFFFF"/>
-                </a:solidFill>
-                <a:latin typeface="Consolas" pitchFamily="34" charset="0"/>
-                <a:ea typeface="Consolas" pitchFamily="34" charset="-122"/>
-                <a:cs typeface="Consolas" pitchFamily="34" charset="-120"/>
-              </a:rPr>
-              <a:t>timeseries count = sum(dt.service.request.count),</a:t>
-            </a:r>
-            <a:endParaRPr lang="en-US" sz="1100" dirty="0"/>
-          </a:p>
-          <a:p>
-            <a:pPr indent="0" marL="0">
-              <a:buNone/>
-            </a:pPr>
-            <a:r>
-              <a:rPr lang="en-US" sz="1100" dirty="0">
-                <a:solidFill>
-                  <a:srgbClr val="FFFFFF"/>
-                </a:solidFill>
-                <a:latin typeface="Consolas" pitchFamily="34" charset="0"/>
-                <a:ea typeface="Consolas" pitchFamily="34" charset="-122"/>
-                <a:cs typeface="Consolas" pitchFamily="34" charset="-120"/>
-              </a:rPr>
-              <a:t>  filter: dt.service.name == "orders-sdv2 -- orders-demo"</a:t>
-            </a:r>
-            <a:endParaRPr lang="en-US" sz="1100" dirty="0"/>
-          </a:p>
-        </p:txBody>
-      </p:sp>
-      <p:sp>
-        <p:nvSpPr>
-          <p:cNvPr id="6" name="Text 4"/>
-          <p:cNvSpPr/>
-          <p:nvPr/>
-        </p:nvSpPr>
-        <p:spPr>
-          <a:xfrm>
-            <a:off x="457200" y="3840480"/>
-            <a:ext cx="8229600" cy="832104"/>
-          </a:xfrm>
-          <a:prstGeom prst="rect">
-            <a:avLst/>
-          </a:prstGeom>
-          <a:noFill/>
-          <a:ln/>
-        </p:spPr>
-        <p:txBody>
-          <a:bodyPr wrap="square" lIns="0" tIns="0" rIns="0" bIns="0" rtlCol="0" anchor="t"/>
-          <a:lstStyle/>
-          <a:p>
-            <a:pPr indent="0" marL="0">
-              <a:buNone/>
-            </a:pPr>
-            <a:r>
-              <a:rPr lang="en-US" sz="2000" dirty="0">
-                <a:solidFill>
-                  <a:srgbClr val="FFFFFF"/>
-                </a:solidFill>
-                <a:latin typeface="Segoe UI" pitchFamily="34" charset="0"/>
-                <a:ea typeface="Segoe UI" pitchFamily="34" charset="-122"/>
-                <a:cs typeface="Segoe UI" pitchFamily="34" charset="-120"/>
-              </a:rPr>
-              <a:t>Same answer. Fewer lines, fewer scanned records, stable across entity re-detection.</a:t>
             </a:r>
             <a:endParaRPr lang="en-US" sz="2000" dirty="0"/>
           </a:p>
@@ -8575,7 +8573,7 @@
                 <a:ea typeface="Segoe UI" pitchFamily="34" charset="-122"/>
                 <a:cs typeface="Segoe UI" pitchFamily="34" charset="-120"/>
               </a:rPr>
-              <a:t>What's coming</a:t>
+              <a:t>Metric-first DQL</a:t>
             </a:r>
             <a:endParaRPr lang="en-US" sz="3600" dirty="0"/>
           </a:p>
@@ -8640,7 +8638,173 @@
         <p:spPr>
           <a:xfrm>
             <a:off x="457200" y="1463040"/>
-            <a:ext cx="8229600" cy="3291840"/>
+            <a:ext cx="8229600" cy="2240280"/>
+          </a:xfrm>
+          <a:prstGeom prst="rect">
+            <a:avLst/>
+          </a:prstGeom>
+          <a:solidFill>
+            <a:srgbClr val="1A1A2E"/>
+          </a:solidFill>
+          <a:ln/>
+        </p:spPr>
+        <p:txBody>
+          <a:bodyPr wrap="square" rtlCol="0" anchor="t"/>
+          <a:lstStyle/>
+          <a:p>
+            <a:pPr indent="0" marL="0">
+              <a:buNone/>
+            </a:pPr>
+            <a:r>
+              <a:rPr lang="en-US" sz="1100" dirty="0">
+                <a:solidFill>
+                  <a:srgbClr val="FFFFFF"/>
+                </a:solidFill>
+                <a:latin typeface="Consolas" pitchFamily="34" charset="0"/>
+                <a:ea typeface="Consolas" pitchFamily="34" charset="-122"/>
+                <a:cs typeface="Consolas" pitchFamily="34" charset="-120"/>
+              </a:rPr>
+              <a:t>// Classic shape</a:t>
+            </a:r>
+            <a:endParaRPr lang="en-US" sz="1100" dirty="0"/>
+          </a:p>
+          <a:p>
+            <a:pPr indent="0" marL="0">
+              <a:buNone/>
+            </a:pPr>
+            <a:r>
+              <a:rPr lang="en-US" sz="1100" dirty="0">
+                <a:solidFill>
+                  <a:srgbClr val="FFFFFF"/>
+                </a:solidFill>
+                <a:latin typeface="Consolas" pitchFamily="34" charset="0"/>
+                <a:ea typeface="Consolas" pitchFamily="34" charset="-122"/>
+                <a:cs typeface="Consolas" pitchFamily="34" charset="-120"/>
+              </a:rPr>
+              <a:t>fetch dt.entity.service</a:t>
+            </a:r>
+            <a:endParaRPr lang="en-US" sz="1100" dirty="0"/>
+          </a:p>
+          <a:p>
+            <a:pPr indent="0" marL="0">
+              <a:buNone/>
+            </a:pPr>
+            <a:r>
+              <a:rPr lang="en-US" sz="1100" dirty="0">
+                <a:solidFill>
+                  <a:srgbClr val="FFFFFF"/>
+                </a:solidFill>
+                <a:latin typeface="Consolas" pitchFamily="34" charset="0"/>
+                <a:ea typeface="Consolas" pitchFamily="34" charset="-122"/>
+                <a:cs typeface="Consolas" pitchFamily="34" charset="-120"/>
+              </a:rPr>
+              <a:t>| filter entity.name == "orders-sdv2 -- orders-demo"</a:t>
+            </a:r>
+            <a:endParaRPr lang="en-US" sz="1100" dirty="0"/>
+          </a:p>
+          <a:p>
+            <a:pPr indent="0" marL="0">
+              <a:buNone/>
+            </a:pPr>
+            <a:r>
+              <a:rPr lang="en-US" sz="1100" dirty="0">
+                <a:solidFill>
+                  <a:srgbClr val="FFFFFF"/>
+                </a:solidFill>
+                <a:latin typeface="Consolas" pitchFamily="34" charset="0"/>
+                <a:ea typeface="Consolas" pitchFamily="34" charset="-122"/>
+                <a:cs typeface="Consolas" pitchFamily="34" charset="-120"/>
+              </a:rPr>
+              <a:t>| lookup [timeseries count = sum(dt.service.request.count), by: {dt.entity.service}],</a:t>
+            </a:r>
+            <a:endParaRPr lang="en-US" sz="1100" dirty="0"/>
+          </a:p>
+          <a:p>
+            <a:pPr indent="0" marL="0">
+              <a:buNone/>
+            </a:pPr>
+            <a:r>
+              <a:rPr lang="en-US" sz="1100" dirty="0">
+                <a:solidFill>
+                  <a:srgbClr val="FFFFFF"/>
+                </a:solidFill>
+                <a:latin typeface="Consolas" pitchFamily="34" charset="0"/>
+                <a:ea typeface="Consolas" pitchFamily="34" charset="-122"/>
+                <a:cs typeface="Consolas" pitchFamily="34" charset="-120"/>
+              </a:rPr>
+              <a:t>    sourceField: id, lookupField: dt.entity.service</a:t>
+            </a:r>
+            <a:endParaRPr lang="en-US" sz="1100" dirty="0"/>
+          </a:p>
+          <a:p>
+            <a:pPr indent="0" marL="0">
+              <a:buNone/>
+            </a:pPr>
+            <a:endParaRPr lang="en-US" sz="1100" dirty="0"/>
+          </a:p>
+          <a:p>
+            <a:pPr indent="0" marL="0">
+              <a:buNone/>
+            </a:pPr>
+            <a:r>
+              <a:rPr lang="en-US" sz="1100" dirty="0">
+                <a:solidFill>
+                  <a:srgbClr val="FFFFFF"/>
+                </a:solidFill>
+                <a:latin typeface="Consolas" pitchFamily="34" charset="0"/>
+                <a:ea typeface="Consolas" pitchFamily="34" charset="-122"/>
+                <a:cs typeface="Consolas" pitchFamily="34" charset="-120"/>
+              </a:rPr>
+              <a:t>// Latest shape</a:t>
+            </a:r>
+            <a:endParaRPr lang="en-US" sz="1100" dirty="0"/>
+          </a:p>
+          <a:p>
+            <a:pPr indent="0" marL="0">
+              <a:buNone/>
+            </a:pPr>
+            <a:r>
+              <a:rPr lang="en-US" sz="1100" dirty="0">
+                <a:solidFill>
+                  <a:srgbClr val="FFFFFF"/>
+                </a:solidFill>
+                <a:latin typeface="Consolas" pitchFamily="34" charset="0"/>
+                <a:ea typeface="Consolas" pitchFamily="34" charset="-122"/>
+                <a:cs typeface="Consolas" pitchFamily="34" charset="-120"/>
+              </a:rPr>
+              <a:t>timeseries count = sum(dt.service.request.count),</a:t>
+            </a:r>
+            <a:endParaRPr lang="en-US" sz="1100" dirty="0"/>
+          </a:p>
+          <a:p>
+            <a:pPr indent="0" marL="0">
+              <a:buNone/>
+            </a:pPr>
+            <a:r>
+              <a:rPr lang="en-US" sz="1100" dirty="0">
+                <a:solidFill>
+                  <a:srgbClr val="FFFFFF"/>
+                </a:solidFill>
+                <a:latin typeface="Consolas" pitchFamily="34" charset="0"/>
+                <a:ea typeface="Consolas" pitchFamily="34" charset="-122"/>
+                <a:cs typeface="Consolas" pitchFamily="34" charset="-120"/>
+              </a:rPr>
+              <a:t>  filter: dt.service.name == "orders-sdv2 -- orders-demo"</a:t>
+            </a:r>
+            <a:endParaRPr lang="en-US" sz="1100" dirty="0"/>
+          </a:p>
+        </p:txBody>
+      </p:sp>
+      <p:sp>
+        <p:nvSpPr>
+          <p:cNvPr id="6" name="Text 4"/>
+          <p:cNvSpPr/>
+          <p:nvPr/>
+        </p:nvSpPr>
+        <p:spPr>
+          <a:xfrm>
+            <a:off x="457200" y="3840480"/>
+            <a:ext cx="8229600" cy="832104"/>
           </a:xfrm>
           <a:prstGeom prst="rect">
             <a:avLst/>
@@ -8652,12 +8816,8 @@
           <a:bodyPr wrap="square" lIns="0" tIns="0" rIns="0" bIns="0" rtlCol="0" anchor="t"/>
           <a:lstStyle/>
           <a:p>
-            <a:pPr marL="342900" indent="-342900">
-              <a:lnSpc>
-                <a:spcPct val="120000"/>
-              </a:lnSpc>
-              <a:buSzPct val="100000"/>
-              <a:buChar char="•"/>
+            <a:pPr indent="0" marL="0">
+              <a:buNone/>
             </a:pPr>
             <a:r>
               <a:rPr lang="en-US" sz="2000" dirty="0">
@@ -8668,133 +8828,7 @@
                 <a:ea typeface="Segoe UI" pitchFamily="34" charset="-122"/>
                 <a:cs typeface="Segoe UI" pitchFamily="34" charset="-120"/>
               </a:rPr>
-              <a:t>Automatic URL normalization — closes the GET /* gap</a:t>
-            </a:r>
-            <a:endParaRPr lang="en-US" sz="2000" dirty="0"/>
-          </a:p>
-          <a:p>
-            <a:pPr marL="342900" indent="-342900">
-              <a:lnSpc>
-                <a:spcPct val="120000"/>
-              </a:lnSpc>
-              <a:buSzPct val="100000"/>
-              <a:buChar char="•"/>
-            </a:pPr>
-            <a:r>
-              <a:rPr lang="en-US" sz="2000" dirty="0">
-                <a:solidFill>
-                  <a:srgbClr val="FFFFFF"/>
-                </a:solidFill>
-                <a:latin typeface="Segoe UI" pitchFamily="34" charset="0"/>
-                <a:ea typeface="Segoe UI" pitchFamily="34" charset="-122"/>
-                <a:cs typeface="Segoe UI" pitchFamily="34" charset="-120"/>
-              </a:rPr>
-              <a:t>Pipeline-side naming in OpenPipeline — admin writes a rule, dt.service.name set on every span centrally</a:t>
-            </a:r>
-            <a:endParaRPr lang="en-US" sz="2000" dirty="0"/>
-          </a:p>
-          <a:p>
-            <a:pPr marL="342900" indent="-342900">
-              <a:lnSpc>
-                <a:spcPct val="120000"/>
-              </a:lnSpc>
-              <a:buSzPct val="100000"/>
-              <a:buChar char="•"/>
-            </a:pPr>
-            <a:r>
-              <a:rPr lang="en-US" sz="2000" dirty="0">
-                <a:solidFill>
-                  <a:srgbClr val="FFFFFF"/>
-                </a:solidFill>
-                <a:latin typeface="Segoe UI" pitchFamily="34" charset="0"/>
-                <a:ea typeface="Segoe UI" pitchFamily="34" charset="-122"/>
-                <a:cs typeface="Segoe UI" pitchFamily="34" charset="-120"/>
-              </a:rPr>
-              <a:t>SERVICE_DEPLOYMENT — per-env entity orthogonal to SERVICE; staging vs prod without splitting identity (maps to Datadog's service+env+version)</a:t>
-            </a:r>
-            <a:endParaRPr lang="en-US" sz="2000" dirty="0"/>
-          </a:p>
-          <a:p>
-            <a:pPr marL="342900" indent="-342900">
-              <a:lnSpc>
-                <a:spcPct val="120000"/>
-              </a:lnSpc>
-              <a:buSzPct val="100000"/>
-              <a:buChar char="•"/>
-            </a:pPr>
-            <a:r>
-              <a:rPr lang="en-US" sz="2000" dirty="0">
-                <a:solidFill>
-                  <a:srgbClr val="FFFFFF"/>
-                </a:solidFill>
-                <a:latin typeface="Segoe UI" pitchFamily="34" charset="0"/>
-                <a:ea typeface="Segoe UI" pitchFamily="34" charset="-122"/>
-                <a:cs typeface="Segoe UI" pitchFamily="34" charset="-120"/>
-              </a:rPr>
-              <a:t>Primary Fields as metric dimensions — k8s.cluster.name, tags become first-class on service metrics</a:t>
-            </a:r>
-            <a:endParaRPr lang="en-US" sz="2000" dirty="0"/>
-          </a:p>
-          <a:p>
-            <a:pPr marL="342900" indent="-342900">
-              <a:lnSpc>
-                <a:spcPct val="120000"/>
-              </a:lnSpc>
-              <a:buSzPct val="100000"/>
-              <a:buChar char="•"/>
-            </a:pPr>
-            <a:r>
-              <a:rPr lang="en-US" sz="2000" dirty="0">
-                <a:solidFill>
-                  <a:srgbClr val="FFFFFF"/>
-                </a:solidFill>
-                <a:latin typeface="Segoe UI" pitchFamily="34" charset="0"/>
-                <a:ea typeface="Segoe UI" pitchFamily="34" charset="-122"/>
-                <a:cs typeface="Segoe UI" pitchFamily="34" charset="-120"/>
-              </a:rPr>
-              <a:t>Services app rewire to timeseries-first — list + detail pages go query-led</a:t>
-            </a:r>
-            <a:endParaRPr lang="en-US" sz="2000" dirty="0"/>
-          </a:p>
-          <a:p>
-            <a:pPr marL="342900" indent="-342900">
-              <a:lnSpc>
-                <a:spcPct val="120000"/>
-              </a:lnSpc>
-              <a:buSzPct val="100000"/>
-              <a:buChar char="•"/>
-            </a:pPr>
-            <a:r>
-              <a:rPr lang="en-US" sz="2000" dirty="0">
-                <a:solidFill>
-                  <a:srgbClr val="FFFFFF"/>
-                </a:solidFill>
-                <a:latin typeface="Segoe UI" pitchFamily="34" charset="0"/>
-                <a:ea typeface="Segoe UI" pitchFamily="34" charset="-122"/>
-                <a:cs typeface="Segoe UI" pitchFamily="34" charset="-120"/>
-              </a:rPr>
-              <a:t>dt.service.database.* linked to real DB entities — future SDv2-for-OneAgent release; span data is already shaped correctly</a:t>
-            </a:r>
-            <a:endParaRPr lang="en-US" sz="2000" dirty="0"/>
-          </a:p>
-          <a:p>
-            <a:pPr marL="342900" indent="-342900">
-              <a:lnSpc>
-                <a:spcPct val="120000"/>
-              </a:lnSpc>
-              <a:buSzPct val="100000"/>
-              <a:buChar char="•"/>
-            </a:pPr>
-            <a:r>
-              <a:rPr lang="en-US" sz="2000" dirty="0">
-                <a:solidFill>
-                  <a:srgbClr val="FFFFFF"/>
-                </a:solidFill>
-                <a:latin typeface="Segoe UI" pitchFamily="34" charset="0"/>
-                <a:ea typeface="Segoe UI" pitchFamily="34" charset="-122"/>
-                <a:cs typeface="Segoe UI" pitchFamily="34" charset="-120"/>
-              </a:rPr>
-              <a:t>Messaging → broker entity — same idea, further out</a:t>
+              <a:t>Same answer. Fewer lines, fewer scanned records, stable across entity re-detection.</a:t>
             </a:r>
             <a:endParaRPr lang="en-US" sz="2000" dirty="0"/>
           </a:p>
@@ -8858,7 +8892,7 @@
                 <a:ea typeface="Segoe UI" pitchFamily="34" charset="-122"/>
                 <a:cs typeface="Segoe UI" pitchFamily="34" charset="-120"/>
               </a:rPr>
-              <a:t>What to do today</a:t>
+              <a:t>What's coming</a:t>
             </a:r>
             <a:endParaRPr lang="en-US" sz="3600" dirty="0"/>
           </a:p>
@@ -8951,7 +8985,7 @@
                 <a:ea typeface="Segoe UI" pitchFamily="34" charset="-122"/>
                 <a:cs typeface="Segoe UI" pitchFamily="34" charset="-120"/>
               </a:rPr>
-              <a:t>Set service.name on workloads you own — OTEL_SERVICE_NAME and OTEL_RESOURCE_ATTRIBUTES</a:t>
+              <a:t>Automatic URL normalization — closes the GET /* gap</a:t>
             </a:r>
             <a:endParaRPr lang="en-US" sz="2000" dirty="0"/>
           </a:p>
@@ -8972,7 +9006,7 @@
                 <a:ea typeface="Segoe UI" pitchFamily="34" charset="-122"/>
                 <a:cs typeface="Segoe UI" pitchFamily="34" charset="-120"/>
               </a:rPr>
-              <a:t>Write DQL metric-first — skip the entity table unless you need ownership or tags</a:t>
+              <a:t>Pipeline-side naming in OpenPipeline — admin writes a rule, dt.service.name set on every span centrally</a:t>
             </a:r>
             <a:endParaRPr lang="en-US" sz="2000" dirty="0"/>
           </a:p>
@@ -8993,7 +9027,7 @@
                 <a:ea typeface="Segoe UI" pitchFamily="34" charset="-122"/>
                 <a:cs typeface="Segoe UI" pitchFamily="34" charset="-120"/>
               </a:rPr>
-              <a:t>Don't invest new effort in Services Classic naming rules</a:t>
+              <a:t>SERVICE_DEPLOYMENT — per-env entity orthogonal to SERVICE; staging vs prod without splitting identity (maps to Datadog's service+env+version)</a:t>
             </a:r>
             <a:endParaRPr lang="en-US" sz="2000" dirty="0"/>
           </a:p>
@@ -9014,7 +9048,7 @@
                 <a:ea typeface="Segoe UI" pitchFamily="34" charset="-122"/>
                 <a:cs typeface="Segoe UI" pitchFamily="34" charset="-120"/>
               </a:rPr>
-              <a:t>Don't double down on splitting rules for per-env views — use dimensions now, SERVICE_DEPLOYMENT for the rest</a:t>
+              <a:t>Primary Fields as metric dimensions — k8s.cluster.name, tags become first-class on service metrics</a:t>
             </a:r>
             <a:endParaRPr lang="en-US" sz="2000" dirty="0"/>
           </a:p>
@@ -9035,7 +9069,49 @@
                 <a:ea typeface="Segoe UI" pitchFamily="34" charset="-122"/>
                 <a:cs typeface="Segoe UI" pitchFamily="34" charset="-120"/>
               </a:rPr>
-              <a:t>Pick names durable enough to survive the SDv2 move and the pipeline-naming move</a:t>
+              <a:t>Services app rewire to timeseries-first — list + detail pages go query-led</a:t>
+            </a:r>
+            <a:endParaRPr lang="en-US" sz="2000" dirty="0"/>
+          </a:p>
+          <a:p>
+            <a:pPr marL="342900" indent="-342900">
+              <a:lnSpc>
+                <a:spcPct val="120000"/>
+              </a:lnSpc>
+              <a:buSzPct val="100000"/>
+              <a:buChar char="•"/>
+            </a:pPr>
+            <a:r>
+              <a:rPr lang="en-US" sz="2000" dirty="0">
+                <a:solidFill>
+                  <a:srgbClr val="FFFFFF"/>
+                </a:solidFill>
+                <a:latin typeface="Segoe UI" pitchFamily="34" charset="0"/>
+                <a:ea typeface="Segoe UI" pitchFamily="34" charset="-122"/>
+                <a:cs typeface="Segoe UI" pitchFamily="34" charset="-120"/>
+              </a:rPr>
+              <a:t>dt.service.database.* linked to real DB entities — future SDv2-for-OneAgent release; span data is already shaped correctly</a:t>
+            </a:r>
+            <a:endParaRPr lang="en-US" sz="2000" dirty="0"/>
+          </a:p>
+          <a:p>
+            <a:pPr marL="342900" indent="-342900">
+              <a:lnSpc>
+                <a:spcPct val="120000"/>
+              </a:lnSpc>
+              <a:buSzPct val="100000"/>
+              <a:buChar char="•"/>
+            </a:pPr>
+            <a:r>
+              <a:rPr lang="en-US" sz="2000" dirty="0">
+                <a:solidFill>
+                  <a:srgbClr val="FFFFFF"/>
+                </a:solidFill>
+                <a:latin typeface="Segoe UI" pitchFamily="34" charset="0"/>
+                <a:ea typeface="Segoe UI" pitchFamily="34" charset="-122"/>
+                <a:cs typeface="Segoe UI" pitchFamily="34" charset="-120"/>
+              </a:rPr>
+              <a:t>Messaging → broker entity — same idea, further out</a:t>
             </a:r>
             <a:endParaRPr lang="en-US" sz="2000" dirty="0"/>
           </a:p>
@@ -9052,6 +9128,247 @@
 <file path=ppt/slides/slide22.xml><?xml version="1.0" encoding="utf-8"?>
 <p:sld xmlns:a="http://schemas.openxmlformats.org/drawingml/2006/main" xmlns:r="http://schemas.openxmlformats.org/officeDocument/2006/relationships" xmlns:p="http://schemas.openxmlformats.org/presentationml/2006/main">
   <p:cSld name="Slide 22">
+    <p:spTree>
+      <p:nvGrpSpPr>
+        <p:cNvPr id="1" name=""/>
+        <p:cNvGrpSpPr/>
+        <p:nvPr/>
+      </p:nvGrpSpPr>
+      <p:grpSpPr>
+        <a:xfrm>
+          <a:off x="0" y="0"/>
+          <a:ext cx="0" cy="0"/>
+          <a:chOff x="0" y="0"/>
+          <a:chExt cx="0" cy="0"/>
+        </a:xfrm>
+      </p:grpSpPr>
+      <p:sp>
+        <p:nvSpPr>
+          <p:cNvPr id="2" name="Text 0"/>
+          <p:cNvSpPr/>
+          <p:nvPr/>
+        </p:nvSpPr>
+        <p:spPr>
+          <a:xfrm>
+            <a:off x="457200" y="457200"/>
+            <a:ext cx="8229600" cy="640080"/>
+          </a:xfrm>
+          <a:prstGeom prst="rect">
+            <a:avLst/>
+          </a:prstGeom>
+          <a:noFill/>
+          <a:ln/>
+        </p:spPr>
+        <p:txBody>
+          <a:bodyPr wrap="square" rtlCol="0" anchor="ctr"/>
+          <a:lstStyle/>
+          <a:p>
+            <a:pPr indent="0" marL="0">
+              <a:buNone/>
+            </a:pPr>
+            <a:r>
+              <a:rPr lang="en-US" sz="3600" b="1" dirty="0">
+                <a:solidFill>
+                  <a:srgbClr val="FFFFFF"/>
+                </a:solidFill>
+                <a:latin typeface="Segoe UI" pitchFamily="34" charset="0"/>
+                <a:ea typeface="Segoe UI" pitchFamily="34" charset="-122"/>
+                <a:cs typeface="Segoe UI" pitchFamily="34" charset="-120"/>
+              </a:rPr>
+              <a:t>What to do today</a:t>
+            </a:r>
+            <a:endParaRPr lang="en-US" sz="3600" dirty="0"/>
+          </a:p>
+        </p:txBody>
+      </p:sp>
+      <p:sp>
+        <p:nvSpPr>
+          <p:cNvPr id="3" name="Shape 1"/>
+          <p:cNvSpPr/>
+          <p:nvPr/>
+        </p:nvSpPr>
+        <p:spPr>
+          <a:xfrm>
+            <a:off x="457200" y="1188720"/>
+            <a:ext cx="4114800" cy="54864"/>
+          </a:xfrm>
+          <a:prstGeom prst="rect">
+            <a:avLst/>
+          </a:prstGeom>
+          <a:solidFill>
+            <a:srgbClr val="00A1E0"/>
+          </a:solidFill>
+          <a:ln w="12700">
+            <a:solidFill>
+              <a:srgbClr val="00A1E0"/>
+            </a:solidFill>
+            <a:prstDash val="solid"/>
+          </a:ln>
+        </p:spPr>
+      </p:sp>
+      <p:sp>
+        <p:nvSpPr>
+          <p:cNvPr id="4" name="Shape 2"/>
+          <p:cNvSpPr/>
+          <p:nvPr/>
+        </p:nvSpPr>
+        <p:spPr>
+          <a:xfrm>
+            <a:off x="4572000" y="1188720"/>
+            <a:ext cx="4114800" cy="54864"/>
+          </a:xfrm>
+          <a:prstGeom prst="rect">
+            <a:avLst/>
+          </a:prstGeom>
+          <a:solidFill>
+            <a:srgbClr val="B455B6"/>
+          </a:solidFill>
+          <a:ln w="12700">
+            <a:solidFill>
+              <a:srgbClr val="B455B6"/>
+            </a:solidFill>
+            <a:prstDash val="solid"/>
+          </a:ln>
+        </p:spPr>
+      </p:sp>
+      <p:sp>
+        <p:nvSpPr>
+          <p:cNvPr id="5" name="Text 3"/>
+          <p:cNvSpPr/>
+          <p:nvPr/>
+        </p:nvSpPr>
+        <p:spPr>
+          <a:xfrm>
+            <a:off x="457200" y="1463040"/>
+            <a:ext cx="8229600" cy="3291840"/>
+          </a:xfrm>
+          <a:prstGeom prst="rect">
+            <a:avLst/>
+          </a:prstGeom>
+          <a:noFill/>
+          <a:ln/>
+        </p:spPr>
+        <p:txBody>
+          <a:bodyPr wrap="square" lIns="0" tIns="0" rIns="0" bIns="0" rtlCol="0" anchor="t"/>
+          <a:lstStyle/>
+          <a:p>
+            <a:pPr marL="342900" indent="-342900">
+              <a:lnSpc>
+                <a:spcPct val="120000"/>
+              </a:lnSpc>
+              <a:buSzPct val="100000"/>
+              <a:buChar char="•"/>
+            </a:pPr>
+            <a:r>
+              <a:rPr lang="en-US" sz="2000" dirty="0">
+                <a:solidFill>
+                  <a:srgbClr val="FFFFFF"/>
+                </a:solidFill>
+                <a:latin typeface="Segoe UI" pitchFamily="34" charset="0"/>
+                <a:ea typeface="Segoe UI" pitchFamily="34" charset="-122"/>
+                <a:cs typeface="Segoe UI" pitchFamily="34" charset="-120"/>
+              </a:rPr>
+              <a:t>Set service.name on workloads you own — OTEL_SERVICE_NAME and OTEL_RESOURCE_ATTRIBUTES</a:t>
+            </a:r>
+            <a:endParaRPr lang="en-US" sz="2000" dirty="0"/>
+          </a:p>
+          <a:p>
+            <a:pPr marL="342900" indent="-342900">
+              <a:lnSpc>
+                <a:spcPct val="120000"/>
+              </a:lnSpc>
+              <a:buSzPct val="100000"/>
+              <a:buChar char="•"/>
+            </a:pPr>
+            <a:r>
+              <a:rPr lang="en-US" sz="2000" dirty="0">
+                <a:solidFill>
+                  <a:srgbClr val="FFFFFF"/>
+                </a:solidFill>
+                <a:latin typeface="Segoe UI" pitchFamily="34" charset="0"/>
+                <a:ea typeface="Segoe UI" pitchFamily="34" charset="-122"/>
+                <a:cs typeface="Segoe UI" pitchFamily="34" charset="-120"/>
+              </a:rPr>
+              <a:t>Write DQL metric-first — skip the entity table unless you need ownership or tags</a:t>
+            </a:r>
+            <a:endParaRPr lang="en-US" sz="2000" dirty="0"/>
+          </a:p>
+          <a:p>
+            <a:pPr marL="342900" indent="-342900">
+              <a:lnSpc>
+                <a:spcPct val="120000"/>
+              </a:lnSpc>
+              <a:buSzPct val="100000"/>
+              <a:buChar char="•"/>
+            </a:pPr>
+            <a:r>
+              <a:rPr lang="en-US" sz="2000" dirty="0">
+                <a:solidFill>
+                  <a:srgbClr val="FFFFFF"/>
+                </a:solidFill>
+                <a:latin typeface="Segoe UI" pitchFamily="34" charset="0"/>
+                <a:ea typeface="Segoe UI" pitchFamily="34" charset="-122"/>
+                <a:cs typeface="Segoe UI" pitchFamily="34" charset="-120"/>
+              </a:rPr>
+              <a:t>Don't invest new effort in Services Classic naming rules</a:t>
+            </a:r>
+            <a:endParaRPr lang="en-US" sz="2000" dirty="0"/>
+          </a:p>
+          <a:p>
+            <a:pPr marL="342900" indent="-342900">
+              <a:lnSpc>
+                <a:spcPct val="120000"/>
+              </a:lnSpc>
+              <a:buSzPct val="100000"/>
+              <a:buChar char="•"/>
+            </a:pPr>
+            <a:r>
+              <a:rPr lang="en-US" sz="2000" dirty="0">
+                <a:solidFill>
+                  <a:srgbClr val="FFFFFF"/>
+                </a:solidFill>
+                <a:latin typeface="Segoe UI" pitchFamily="34" charset="0"/>
+                <a:ea typeface="Segoe UI" pitchFamily="34" charset="-122"/>
+                <a:cs typeface="Segoe UI" pitchFamily="34" charset="-120"/>
+              </a:rPr>
+              <a:t>Don't double down on splitting rules for per-env views — use dimensions now, SERVICE_DEPLOYMENT for the rest</a:t>
+            </a:r>
+            <a:endParaRPr lang="en-US" sz="2000" dirty="0"/>
+          </a:p>
+          <a:p>
+            <a:pPr marL="342900" indent="-342900">
+              <a:lnSpc>
+                <a:spcPct val="120000"/>
+              </a:lnSpc>
+              <a:buSzPct val="100000"/>
+              <a:buChar char="•"/>
+            </a:pPr>
+            <a:r>
+              <a:rPr lang="en-US" sz="2000" dirty="0">
+                <a:solidFill>
+                  <a:srgbClr val="FFFFFF"/>
+                </a:solidFill>
+                <a:latin typeface="Segoe UI" pitchFamily="34" charset="0"/>
+                <a:ea typeface="Segoe UI" pitchFamily="34" charset="-122"/>
+                <a:cs typeface="Segoe UI" pitchFamily="34" charset="-120"/>
+              </a:rPr>
+              <a:t>Pick names durable enough to survive the SDv2 move and the pipeline-naming move</a:t>
+            </a:r>
+            <a:endParaRPr lang="en-US" sz="2000" dirty="0"/>
+          </a:p>
+        </p:txBody>
+      </p:sp>
+    </p:spTree>
+  </p:cSld>
+  <p:clrMapOvr>
+    <a:masterClrMapping/>
+  </p:clrMapOvr>
+</p:sld>
+</file>
+
+<file path=ppt/slides/slide23.xml><?xml version="1.0" encoding="utf-8"?>
+<p:sld xmlns:a="http://schemas.openxmlformats.org/drawingml/2006/main" xmlns:r="http://schemas.openxmlformats.org/officeDocument/2006/relationships" xmlns:p="http://schemas.openxmlformats.org/presentationml/2006/main">
+  <p:cSld name="Slide 23">
     <p:spTree>
       <p:nvGrpSpPr>
         <p:cNvPr id="1" name=""/>
